--- a/PS11ContributingSlides.pptx
+++ b/PS11ContributingSlides.pptx
@@ -16,9 +16,10 @@
     <p:sldId id="264" r:id="rId10"/>
     <p:sldId id="265" r:id="rId11"/>
     <p:sldId id="266" r:id="rId12"/>
+    <p:sldId id="267" r:id="rId13"/>
   </p:sldIdLst>
   <p:notesMasterIdLst>
-    <p:notesMasterId r:id="rId13"/>
+    <p:notesMasterId r:id="rId14"/>
   </p:notesMasterIdLst>
   <p:sldSz cx="12192000" cy="6858000"/>
   <p:notesSz cx="6858000" cy="12192000"/>
@@ -712,6 +713,94 @@
             <a:fld id="{F7021451-1387-4CA6-816F-3879F97B5CBC}" type="slidenum">
               <a:rPr lang="en-US"/>
               <a:t>11</a:t>
+            </a:fld>
+            <a:endParaRPr lang="en-US"/>
+          </a:p>
+        </p:txBody>
+      </p:sp>
+    </p:spTree>
+    <p:extLst>
+      <p:ext uri="{BB962C8B-B14F-4D97-AF65-F5344CB8AC3E}">
+        <p14:creationId xmlns:p14="http://schemas.microsoft.com/office/powerpoint/2010/main" val="1024086991"/>
+      </p:ext>
+    </p:extLst>
+  </p:cSld>
+  <p:clrMapOvr>
+    <a:masterClrMapping/>
+  </p:clrMapOvr>
+</p:notes>
+</file>
+
+<file path=ppt/notesSlides/notesSlide12.xml><?xml version="1.0" encoding="utf-8"?>
+<p:notes xmlns:a="http://schemas.openxmlformats.org/drawingml/2006/main" xmlns:r="http://schemas.openxmlformats.org/officeDocument/2006/relationships" xmlns:p="http://schemas.openxmlformats.org/presentationml/2006/main">
+  <p:cSld>
+    <p:spTree>
+      <p:nvGrpSpPr>
+        <p:cNvPr id="1" name=""/>
+        <p:cNvGrpSpPr/>
+        <p:nvPr/>
+      </p:nvGrpSpPr>
+      <p:grpSpPr>
+        <a:xfrm>
+          <a:off x="0" y="0"/>
+          <a:ext cx="0" cy="0"/>
+          <a:chOff x="0" y="0"/>
+          <a:chExt cx="0" cy="0"/>
+        </a:xfrm>
+      </p:grpSpPr>
+      <p:sp>
+        <p:nvSpPr>
+          <p:cNvPr id="2" name="Slide Image Placeholder 1"/>
+          <p:cNvSpPr>
+            <a:spLocks noGrp="1" noRot="1" noChangeAspect="1"/>
+          </p:cNvSpPr>
+          <p:nvPr>
+            <p:ph type="sldImg"/>
+          </p:nvPr>
+        </p:nvSpPr>
+        <p:spPr/>
+      </p:sp>
+      <p:sp>
+        <p:nvSpPr>
+          <p:cNvPr id="3" name="Notes Placeholder 2"/>
+          <p:cNvSpPr>
+            <a:spLocks noGrp="1"/>
+          </p:cNvSpPr>
+          <p:nvPr>
+            <p:ph type="body" idx="1"/>
+          </p:nvPr>
+        </p:nvSpPr>
+        <p:spPr/>
+        <p:txBody>
+          <a:bodyPr/>
+          <a:lstStyle/>
+          <a:p>
+            <a:r>
+              <a:rPr lang="en-US" dirty="0"/>
+              <a:t/>
+            </a:r>
+            <a:endParaRPr lang="en-US" dirty="0"/>
+          </a:p>
+        </p:txBody>
+      </p:sp>
+      <p:sp>
+        <p:nvSpPr>
+          <p:cNvPr id="4" name="Slide Number Placeholder 3"/>
+          <p:cNvSpPr>
+            <a:spLocks noGrp="1"/>
+          </p:cNvSpPr>
+          <p:nvPr>
+            <p:ph type="sldNum" sz="quarter" idx="10"/>
+          </p:nvPr>
+        </p:nvSpPr>
+        <p:spPr/>
+        <p:txBody>
+          <a:bodyPr/>
+          <a:lstStyle/>
+          <a:p>
+            <a:fld id="{F7021451-1387-4CA6-816F-3879F97B5CBC}" type="slidenum">
+              <a:rPr lang="en-US"/>
+              <a:t>12</a:t>
             </a:fld>
             <a:endParaRPr lang="en-US"/>
           </a:p>
@@ -1744,13 +1833,6 @@
 <file path=ppt/slides/slide1.xml><?xml version="1.0" encoding="utf-8"?>
 <p:sld xmlns:a="http://schemas.openxmlformats.org/drawingml/2006/main" xmlns:r="http://schemas.openxmlformats.org/officeDocument/2006/relationships" xmlns:p="http://schemas.openxmlformats.org/presentationml/2006/main">
   <p:cSld name="Slide 1">
-    <p:bg>
-      <p:bgPr>
-        <a:solidFill>
-          <a:srgbClr val="122952"/>
-        </a:solidFill>
-      </p:bgPr>
-    </p:bg>
     <p:spTree>
       <p:nvGrpSpPr>
         <p:cNvPr id="1" name=""/>
@@ -1912,7 +1994,7 @@
               <a:buNone/>
             </a:pPr>
             <a:r>
-              <a:rPr lang="en-US" sz="4400" b="1" dirty="0">
+              <a:rPr lang="en-US" sz="4000" b="1" dirty="0">
                 <a:solidFill>
                   <a:srgbClr val="FFFFFF"/>
                 </a:solidFill>
@@ -1922,7 +2004,7 @@
               </a:rPr>
               <a:t>Contributing to Your Community</a:t>
             </a:r>
-            <a:endParaRPr lang="en-US" sz="4400" dirty="0"/>
+            <a:endParaRPr lang="en-US" sz="4000" dirty="0"/>
           </a:p>
         </p:txBody>
       </p:sp>
@@ -2216,91 +2298,91 @@
       </p:pic>
       <p:sp>
         <p:nvSpPr>
-          <p:cNvPr id="3" name="Text 0"/>
-          <p:cNvSpPr/>
-          <p:nvPr/>
-        </p:nvSpPr>
-        <p:spPr>
-          <a:xfrm>
-            <a:off x="548640" y="320040"/>
-            <a:ext cx="8869680" cy="548640"/>
-          </a:xfrm>
-          <a:prstGeom prst="rect">
-            <a:avLst/>
-          </a:prstGeom>
-          <a:noFill/>
-          <a:ln/>
-        </p:spPr>
-        <p:txBody>
-          <a:bodyPr wrap="square" rtlCol="0" anchor="ctr"/>
-          <a:lstStyle/>
-          <a:p>
-            <a:pPr indent="0" marL="0">
-              <a:buNone/>
-            </a:pPr>
-            <a:r>
-              <a:rPr lang="en-US" sz="2800" b="1" dirty="0">
-                <a:solidFill>
-                  <a:srgbClr val="122952"/>
-                </a:solidFill>
-                <a:latin typeface="Calibri" pitchFamily="34" charset="0"/>
-                <a:ea typeface="Calibri" pitchFamily="34" charset="-122"/>
-                <a:cs typeface="Calibri" pitchFamily="34" charset="-120"/>
-              </a:rPr>
-              <a:t>Revision — Key Terms</a:t>
-            </a:r>
-            <a:endParaRPr lang="en-US" sz="2800" dirty="0"/>
-          </a:p>
-        </p:txBody>
-      </p:sp>
-      <p:sp>
-        <p:nvSpPr>
-          <p:cNvPr id="4" name="Shape 1"/>
-          <p:cNvSpPr/>
-          <p:nvPr/>
-        </p:nvSpPr>
-        <p:spPr>
-          <a:xfrm>
-            <a:off x="548640" y="1161288"/>
-            <a:ext cx="5440680" cy="676656"/>
+          <p:cNvPr id="3" name="Shape 0"/>
+          <p:cNvSpPr/>
+          <p:nvPr/>
+        </p:nvSpPr>
+        <p:spPr>
+          <a:xfrm>
+            <a:off x="548640" y="274320"/>
+            <a:ext cx="2103120" cy="384048"/>
           </a:xfrm>
           <a:prstGeom prst="roundRect">
             <a:avLst>
-              <a:gd name="adj" fmla="val 6757"/>
+              <a:gd name="adj" fmla="val 19048"/>
             </a:avLst>
           </a:prstGeom>
           <a:solidFill>
-            <a:srgbClr val="E8EEF7"/>
+            <a:srgbClr val="1E40AF"/>
           </a:solidFill>
           <a:ln/>
         </p:spPr>
       </p:sp>
       <p:sp>
         <p:nvSpPr>
+          <p:cNvPr id="4" name="Text 1"/>
+          <p:cNvSpPr/>
+          <p:nvPr/>
+        </p:nvSpPr>
+        <p:spPr>
+          <a:xfrm>
+            <a:off x="548640" y="274320"/>
+            <a:ext cx="2103120" cy="384048"/>
+          </a:xfrm>
+          <a:prstGeom prst="rect">
+            <a:avLst/>
+          </a:prstGeom>
+          <a:noFill/>
+          <a:ln/>
+        </p:spPr>
+        <p:txBody>
+          <a:bodyPr wrap="square" lIns="0" tIns="0" rIns="0" bIns="0" rtlCol="0" anchor="ctr"/>
+          <a:lstStyle/>
+          <a:p>
+            <a:pPr algn="ctr" indent="0" marL="0">
+              <a:buNone/>
+            </a:pPr>
+            <a:r>
+              <a:rPr lang="en-US" sz="1100" b="1" dirty="0">
+                <a:solidFill>
+                  <a:srgbClr val="FFFFFF"/>
+                </a:solidFill>
+                <a:latin typeface="Calibri" pitchFamily="34" charset="0"/>
+                <a:ea typeface="Calibri" pitchFamily="34" charset="-122"/>
+                <a:cs typeface="Calibri" pitchFamily="34" charset="-120"/>
+              </a:rPr>
+              <a:t>WORKED EXAMPLE</a:t>
+            </a:r>
+            <a:endParaRPr lang="en-US" sz="1100" dirty="0"/>
+          </a:p>
+        </p:txBody>
+      </p:sp>
+      <p:sp>
+        <p:nvSpPr>
           <p:cNvPr id="5" name="Text 2"/>
           <p:cNvSpPr/>
           <p:nvPr/>
         </p:nvSpPr>
         <p:spPr>
           <a:xfrm>
-            <a:off x="685800" y="1161288"/>
-            <a:ext cx="1828800" cy="676656"/>
-          </a:xfrm>
-          <a:prstGeom prst="rect">
-            <a:avLst/>
-          </a:prstGeom>
-          <a:noFill/>
-          <a:ln/>
-        </p:spPr>
-        <p:txBody>
-          <a:bodyPr wrap="square" rtlCol="0" anchor="ctr"/>
-          <a:lstStyle/>
-          <a:p>
-            <a:pPr indent="0" marL="0">
-              <a:buNone/>
-            </a:pPr>
-            <a:r>
-              <a:rPr lang="en-US" sz="1200" b="1" dirty="0">
+            <a:off x="548640" y="822960"/>
+            <a:ext cx="8869680" cy="640080"/>
+          </a:xfrm>
+          <a:prstGeom prst="rect">
+            <a:avLst/>
+          </a:prstGeom>
+          <a:noFill/>
+          <a:ln/>
+        </p:spPr>
+        <p:txBody>
+          <a:bodyPr wrap="square" rtlCol="0" anchor="ctr"/>
+          <a:lstStyle/>
+          <a:p>
+            <a:pPr indent="0" marL="0">
+              <a:buNone/>
+            </a:pPr>
+            <a:r>
+              <a:rPr lang="en-US" sz="2300" b="1" dirty="0">
                 <a:solidFill>
                   <a:srgbClr val="122952"/>
                 </a:solidFill>
@@ -2308,107 +2390,107 @@
                 <a:ea typeface="Calibri" pitchFamily="34" charset="-122"/>
                 <a:cs typeface="Calibri" pitchFamily="34" charset="-120"/>
               </a:rPr>
-              <a:t>Volunteer</a:t>
-            </a:r>
-            <a:endParaRPr lang="en-US" sz="1200" dirty="0"/>
-          </a:p>
-        </p:txBody>
-      </p:sp>
-      <p:sp>
-        <p:nvSpPr>
-          <p:cNvPr id="6" name="Text 3"/>
-          <p:cNvSpPr/>
-          <p:nvPr/>
-        </p:nvSpPr>
-        <p:spPr>
-          <a:xfrm>
-            <a:off x="2560320" y="1161288"/>
-            <a:ext cx="3291840" cy="676656"/>
-          </a:xfrm>
-          <a:prstGeom prst="rect">
-            <a:avLst/>
-          </a:prstGeom>
-          <a:noFill/>
-          <a:ln/>
-        </p:spPr>
-        <p:txBody>
-          <a:bodyPr wrap="square" rtlCol="0" anchor="ctr"/>
-          <a:lstStyle/>
-          <a:p>
-            <a:pPr indent="0" marL="0">
-              <a:buNone/>
-            </a:pPr>
-            <a:r>
-              <a:rPr lang="en-US" sz="1100" dirty="0">
-                <a:solidFill>
-                  <a:srgbClr val="2A2A2A"/>
-                </a:solidFill>
-                <a:latin typeface="Calibri" pitchFamily="34" charset="0"/>
-                <a:ea typeface="Calibri" pitchFamily="34" charset="-122"/>
-                <a:cs typeface="Calibri" pitchFamily="34" charset="-120"/>
-              </a:rPr>
-              <a:t>Gives time to help without being paid</a:t>
-            </a:r>
-            <a:endParaRPr lang="en-US" sz="1100" dirty="0"/>
-          </a:p>
-        </p:txBody>
-      </p:sp>
-      <p:sp>
-        <p:nvSpPr>
-          <p:cNvPr id="7" name="Shape 4"/>
-          <p:cNvSpPr/>
-          <p:nvPr/>
-        </p:nvSpPr>
-        <p:spPr>
-          <a:xfrm>
-            <a:off x="6263640" y="1161288"/>
-            <a:ext cx="5440680" cy="676656"/>
+              <a:t>A Model Reflection — Priya at the Food Bank</a:t>
+            </a:r>
+            <a:endParaRPr lang="en-US" sz="2300" dirty="0"/>
+          </a:p>
+        </p:txBody>
+      </p:sp>
+      <p:sp>
+        <p:nvSpPr>
+          <p:cNvPr id="6" name="Shape 3"/>
+          <p:cNvSpPr/>
+          <p:nvPr/>
+        </p:nvSpPr>
+        <p:spPr>
+          <a:xfrm>
+            <a:off x="548640" y="1554480"/>
+            <a:ext cx="11064240" cy="1234440"/>
           </a:xfrm>
           <a:prstGeom prst="roundRect">
             <a:avLst>
-              <a:gd name="adj" fmla="val 6757"/>
+              <a:gd name="adj" fmla="val 4444"/>
             </a:avLst>
           </a:prstGeom>
           <a:solidFill>
-            <a:srgbClr val="E8EEF7"/>
+            <a:srgbClr val="8A9AAF"/>
           </a:solidFill>
           <a:ln/>
         </p:spPr>
       </p:sp>
       <p:sp>
         <p:nvSpPr>
+          <p:cNvPr id="7" name="Text 4"/>
+          <p:cNvSpPr/>
+          <p:nvPr/>
+        </p:nvSpPr>
+        <p:spPr>
+          <a:xfrm>
+            <a:off x="822960" y="1664208"/>
+            <a:ext cx="2011680" cy="1005840"/>
+          </a:xfrm>
+          <a:prstGeom prst="rect">
+            <a:avLst/>
+          </a:prstGeom>
+          <a:noFill/>
+          <a:ln/>
+        </p:spPr>
+        <p:txBody>
+          <a:bodyPr wrap="square" rtlCol="0" anchor="ctr"/>
+          <a:lstStyle/>
+          <a:p>
+            <a:pPr indent="0" marL="0">
+              <a:buNone/>
+            </a:pPr>
+            <a:r>
+              <a:rPr lang="en-US" sz="1400" b="1" dirty="0">
+                <a:solidFill>
+                  <a:srgbClr val="FFFFFF"/>
+                </a:solidFill>
+                <a:latin typeface="Calibri" pitchFamily="34" charset="0"/>
+                <a:ea typeface="Calibri" pitchFamily="34" charset="-122"/>
+                <a:cs typeface="Calibri" pitchFamily="34" charset="-120"/>
+              </a:rPr>
+              <a:t>Pass level</a:t>
+            </a:r>
+            <a:endParaRPr lang="en-US" sz="1400" dirty="0"/>
+          </a:p>
+        </p:txBody>
+      </p:sp>
+      <p:sp>
+        <p:nvSpPr>
           <p:cNvPr id="8" name="Text 5"/>
           <p:cNvSpPr/>
           <p:nvPr/>
         </p:nvSpPr>
         <p:spPr>
           <a:xfrm>
-            <a:off x="6400800" y="1161288"/>
-            <a:ext cx="1828800" cy="676656"/>
-          </a:xfrm>
-          <a:prstGeom prst="rect">
-            <a:avLst/>
-          </a:prstGeom>
-          <a:noFill/>
-          <a:ln/>
-        </p:spPr>
-        <p:txBody>
-          <a:bodyPr wrap="square" rtlCol="0" anchor="ctr"/>
-          <a:lstStyle/>
-          <a:p>
-            <a:pPr indent="0" marL="0">
-              <a:buNone/>
-            </a:pPr>
-            <a:r>
-              <a:rPr lang="en-US" sz="1200" b="1" dirty="0">
-                <a:solidFill>
-                  <a:srgbClr val="122952"/>
-                </a:solidFill>
-                <a:latin typeface="Calibri" pitchFamily="34" charset="0"/>
-                <a:ea typeface="Calibri" pitchFamily="34" charset="-122"/>
-                <a:cs typeface="Calibri" pitchFamily="34" charset="-120"/>
-              </a:rPr>
-              <a:t>Voluntary organisation</a:t>
+            <a:off x="3017520" y="1664208"/>
+            <a:ext cx="8412480" cy="1005840"/>
+          </a:xfrm>
+          <a:prstGeom prst="rect">
+            <a:avLst/>
+          </a:prstGeom>
+          <a:noFill/>
+          <a:ln/>
+        </p:spPr>
+        <p:txBody>
+          <a:bodyPr wrap="square" rtlCol="0" anchor="ctr"/>
+          <a:lstStyle/>
+          <a:p>
+            <a:pPr indent="0" marL="0">
+              <a:buNone/>
+            </a:pPr>
+            <a:r>
+              <a:rPr lang="en-US" sz="1200" i="1" dirty="0">
+                <a:solidFill>
+                  <a:srgbClr val="FFFFFF"/>
+                </a:solidFill>
+                <a:latin typeface="Calibri" pitchFamily="34" charset="0"/>
+                <a:ea typeface="Calibri" pitchFamily="34" charset="-122"/>
+                <a:cs typeface="Calibri" pitchFamily="34" charset="-120"/>
+              </a:rPr>
+              <a:t>"I helped sort food donations at the food bank for two hours."</a:t>
             </a:r>
             <a:endParaRPr lang="en-US" sz="1200" dirty="0"/>
           </a:p>
@@ -2416,99 +2498,99 @@
       </p:sp>
       <p:sp>
         <p:nvSpPr>
-          <p:cNvPr id="9" name="Text 6"/>
-          <p:cNvSpPr/>
-          <p:nvPr/>
-        </p:nvSpPr>
-        <p:spPr>
-          <a:xfrm>
-            <a:off x="8275320" y="1161288"/>
-            <a:ext cx="3291840" cy="676656"/>
-          </a:xfrm>
-          <a:prstGeom prst="rect">
-            <a:avLst/>
-          </a:prstGeom>
-          <a:noFill/>
-          <a:ln/>
-        </p:spPr>
-        <p:txBody>
-          <a:bodyPr wrap="square" rtlCol="0" anchor="ctr"/>
-          <a:lstStyle/>
-          <a:p>
-            <a:pPr indent="0" marL="0">
-              <a:buNone/>
-            </a:pPr>
-            <a:r>
-              <a:rPr lang="en-US" sz="1100" dirty="0">
-                <a:solidFill>
-                  <a:srgbClr val="2A2A2A"/>
-                </a:solidFill>
-                <a:latin typeface="Calibri" pitchFamily="34" charset="0"/>
-                <a:ea typeface="Calibri" pitchFamily="34" charset="-122"/>
-                <a:cs typeface="Calibri" pitchFamily="34" charset="-120"/>
-              </a:rPr>
-              <a:t>Group/charity organising unpaid work</a:t>
-            </a:r>
-            <a:endParaRPr lang="en-US" sz="1100" dirty="0"/>
-          </a:p>
-        </p:txBody>
-      </p:sp>
-      <p:sp>
-        <p:nvSpPr>
-          <p:cNvPr id="10" name="Shape 7"/>
-          <p:cNvSpPr/>
-          <p:nvPr/>
-        </p:nvSpPr>
-        <p:spPr>
-          <a:xfrm>
-            <a:off x="548640" y="1947672"/>
-            <a:ext cx="5440680" cy="676656"/>
+          <p:cNvPr id="9" name="Shape 6"/>
+          <p:cNvSpPr/>
+          <p:nvPr/>
+        </p:nvSpPr>
+        <p:spPr>
+          <a:xfrm>
+            <a:off x="548640" y="2971800"/>
+            <a:ext cx="11064240" cy="1234440"/>
           </a:xfrm>
           <a:prstGeom prst="roundRect">
             <a:avLst>
-              <a:gd name="adj" fmla="val 6757"/>
+              <a:gd name="adj" fmla="val 4444"/>
             </a:avLst>
           </a:prstGeom>
           <a:solidFill>
-            <a:srgbClr val="F7F9FC"/>
+            <a:srgbClr val="3E6BA8"/>
           </a:solidFill>
           <a:ln/>
         </p:spPr>
       </p:sp>
       <p:sp>
         <p:nvSpPr>
+          <p:cNvPr id="10" name="Text 7"/>
+          <p:cNvSpPr/>
+          <p:nvPr/>
+        </p:nvSpPr>
+        <p:spPr>
+          <a:xfrm>
+            <a:off x="822960" y="3081528"/>
+            <a:ext cx="2011680" cy="1005840"/>
+          </a:xfrm>
+          <a:prstGeom prst="rect">
+            <a:avLst/>
+          </a:prstGeom>
+          <a:noFill/>
+          <a:ln/>
+        </p:spPr>
+        <p:txBody>
+          <a:bodyPr wrap="square" rtlCol="0" anchor="ctr"/>
+          <a:lstStyle/>
+          <a:p>
+            <a:pPr indent="0" marL="0">
+              <a:buNone/>
+            </a:pPr>
+            <a:r>
+              <a:rPr lang="en-US" sz="1400" b="1" dirty="0">
+                <a:solidFill>
+                  <a:srgbClr val="FFFFFF"/>
+                </a:solidFill>
+                <a:latin typeface="Calibri" pitchFamily="34" charset="0"/>
+                <a:ea typeface="Calibri" pitchFamily="34" charset="-122"/>
+                <a:cs typeface="Calibri" pitchFamily="34" charset="-120"/>
+              </a:rPr>
+              <a:t>Merit level</a:t>
+            </a:r>
+            <a:endParaRPr lang="en-US" sz="1400" dirty="0"/>
+          </a:p>
+        </p:txBody>
+      </p:sp>
+      <p:sp>
+        <p:nvSpPr>
           <p:cNvPr id="11" name="Text 8"/>
           <p:cNvSpPr/>
           <p:nvPr/>
         </p:nvSpPr>
         <p:spPr>
           <a:xfrm>
-            <a:off x="685800" y="1947672"/>
-            <a:ext cx="1828800" cy="676656"/>
-          </a:xfrm>
-          <a:prstGeom prst="rect">
-            <a:avLst/>
-          </a:prstGeom>
-          <a:noFill/>
-          <a:ln/>
-        </p:spPr>
-        <p:txBody>
-          <a:bodyPr wrap="square" rtlCol="0" anchor="ctr"/>
-          <a:lstStyle/>
-          <a:p>
-            <a:pPr indent="0" marL="0">
-              <a:buNone/>
-            </a:pPr>
-            <a:r>
-              <a:rPr lang="en-US" sz="1200" b="1" dirty="0">
-                <a:solidFill>
-                  <a:srgbClr val="122952"/>
-                </a:solidFill>
-                <a:latin typeface="Calibri" pitchFamily="34" charset="0"/>
-                <a:ea typeface="Calibri" pitchFamily="34" charset="-122"/>
-                <a:cs typeface="Calibri" pitchFamily="34" charset="-120"/>
-              </a:rPr>
-              <a:t>Positive impact</a:t>
+            <a:off x="3017520" y="3081528"/>
+            <a:ext cx="8412480" cy="1005840"/>
+          </a:xfrm>
+          <a:prstGeom prst="rect">
+            <a:avLst/>
+          </a:prstGeom>
+          <a:noFill/>
+          <a:ln/>
+        </p:spPr>
+        <p:txBody>
+          <a:bodyPr wrap="square" rtlCol="0" anchor="ctr"/>
+          <a:lstStyle/>
+          <a:p>
+            <a:pPr indent="0" marL="0">
+              <a:buNone/>
+            </a:pPr>
+            <a:r>
+              <a:rPr lang="en-US" sz="1200" i="1" dirty="0">
+                <a:solidFill>
+                  <a:srgbClr val="FFFFFF"/>
+                </a:solidFill>
+                <a:latin typeface="Calibri" pitchFamily="34" charset="0"/>
+                <a:ea typeface="Calibri" pitchFamily="34" charset="-122"/>
+                <a:cs typeface="Calibri" pitchFamily="34" charset="-120"/>
+              </a:rPr>
+              <a:t>"I helped sort food donations and made sure I turned up on time both sessions. When a visitor seemed upset, I made time to listen even though it wasn't my job."</a:t>
             </a:r>
             <a:endParaRPr lang="en-US" sz="1200" dirty="0"/>
           </a:p>
@@ -2516,99 +2598,99 @@
       </p:sp>
       <p:sp>
         <p:nvSpPr>
-          <p:cNvPr id="12" name="Text 9"/>
-          <p:cNvSpPr/>
-          <p:nvPr/>
-        </p:nvSpPr>
-        <p:spPr>
-          <a:xfrm>
-            <a:off x="2560320" y="1947672"/>
-            <a:ext cx="3291840" cy="676656"/>
-          </a:xfrm>
-          <a:prstGeom prst="rect">
-            <a:avLst/>
-          </a:prstGeom>
-          <a:noFill/>
-          <a:ln/>
-        </p:spPr>
-        <p:txBody>
-          <a:bodyPr wrap="square" rtlCol="0" anchor="ctr"/>
-          <a:lstStyle/>
-          <a:p>
-            <a:pPr indent="0" marL="0">
-              <a:buNone/>
-            </a:pPr>
-            <a:r>
-              <a:rPr lang="en-US" sz="1100" dirty="0">
-                <a:solidFill>
-                  <a:srgbClr val="2A2A2A"/>
-                </a:solidFill>
-                <a:latin typeface="Calibri" pitchFamily="34" charset="0"/>
-                <a:ea typeface="Calibri" pitchFamily="34" charset="-122"/>
-                <a:cs typeface="Calibri" pitchFamily="34" charset="-120"/>
-              </a:rPr>
-              <a:t>A good or helpful effect on people/community</a:t>
-            </a:r>
-            <a:endParaRPr lang="en-US" sz="1100" dirty="0"/>
-          </a:p>
-        </p:txBody>
-      </p:sp>
-      <p:sp>
-        <p:nvSpPr>
-          <p:cNvPr id="13" name="Shape 10"/>
-          <p:cNvSpPr/>
-          <p:nvPr/>
-        </p:nvSpPr>
-        <p:spPr>
-          <a:xfrm>
-            <a:off x="6263640" y="1947672"/>
-            <a:ext cx="5440680" cy="676656"/>
+          <p:cNvPr id="12" name="Shape 9"/>
+          <p:cNvSpPr/>
+          <p:nvPr/>
+        </p:nvSpPr>
+        <p:spPr>
+          <a:xfrm>
+            <a:off x="548640" y="4389120"/>
+            <a:ext cx="11064240" cy="1234440"/>
           </a:xfrm>
           <a:prstGeom prst="roundRect">
             <a:avLst>
-              <a:gd name="adj" fmla="val 6757"/>
+              <a:gd name="adj" fmla="val 4444"/>
             </a:avLst>
           </a:prstGeom>
           <a:solidFill>
-            <a:srgbClr val="F7F9FC"/>
+            <a:srgbClr val="122952"/>
           </a:solidFill>
           <a:ln/>
         </p:spPr>
       </p:sp>
       <p:sp>
         <p:nvSpPr>
+          <p:cNvPr id="13" name="Text 10"/>
+          <p:cNvSpPr/>
+          <p:nvPr/>
+        </p:nvSpPr>
+        <p:spPr>
+          <a:xfrm>
+            <a:off x="822960" y="4498848"/>
+            <a:ext cx="2011680" cy="1005840"/>
+          </a:xfrm>
+          <a:prstGeom prst="rect">
+            <a:avLst/>
+          </a:prstGeom>
+          <a:noFill/>
+          <a:ln/>
+        </p:spPr>
+        <p:txBody>
+          <a:bodyPr wrap="square" rtlCol="0" anchor="ctr"/>
+          <a:lstStyle/>
+          <a:p>
+            <a:pPr indent="0" marL="0">
+              <a:buNone/>
+            </a:pPr>
+            <a:r>
+              <a:rPr lang="en-US" sz="1400" b="1" dirty="0">
+                <a:solidFill>
+                  <a:srgbClr val="FFFFFF"/>
+                </a:solidFill>
+                <a:latin typeface="Calibri" pitchFamily="34" charset="0"/>
+                <a:ea typeface="Calibri" pitchFamily="34" charset="-122"/>
+                <a:cs typeface="Calibri" pitchFamily="34" charset="-120"/>
+              </a:rPr>
+              <a:t>Distinction level</a:t>
+            </a:r>
+            <a:endParaRPr lang="en-US" sz="1400" dirty="0"/>
+          </a:p>
+        </p:txBody>
+      </p:sp>
+      <p:sp>
+        <p:nvSpPr>
           <p:cNvPr id="14" name="Text 11"/>
           <p:cNvSpPr/>
           <p:nvPr/>
         </p:nvSpPr>
         <p:spPr>
           <a:xfrm>
-            <a:off x="6400800" y="1947672"/>
-            <a:ext cx="1828800" cy="676656"/>
-          </a:xfrm>
-          <a:prstGeom prst="rect">
-            <a:avLst/>
-          </a:prstGeom>
-          <a:noFill/>
-          <a:ln/>
-        </p:spPr>
-        <p:txBody>
-          <a:bodyPr wrap="square" rtlCol="0" anchor="ctr"/>
-          <a:lstStyle/>
-          <a:p>
-            <a:pPr indent="0" marL="0">
-              <a:buNone/>
-            </a:pPr>
-            <a:r>
-              <a:rPr lang="en-US" sz="1200" b="1" dirty="0">
-                <a:solidFill>
-                  <a:srgbClr val="122952"/>
-                </a:solidFill>
-                <a:latin typeface="Calibri" pitchFamily="34" charset="0"/>
-                <a:ea typeface="Calibri" pitchFamily="34" charset="-122"/>
-                <a:cs typeface="Calibri" pitchFamily="34" charset="-120"/>
-              </a:rPr>
-              <a:t>Community cohesion</a:t>
+            <a:off x="3017520" y="4498848"/>
+            <a:ext cx="8412480" cy="1005840"/>
+          </a:xfrm>
+          <a:prstGeom prst="rect">
+            <a:avLst/>
+          </a:prstGeom>
+          <a:noFill/>
+          <a:ln/>
+        </p:spPr>
+        <p:txBody>
+          <a:bodyPr wrap="square" rtlCol="0" anchor="ctr"/>
+          <a:lstStyle/>
+          <a:p>
+            <a:pPr indent="0" marL="0">
+              <a:buNone/>
+            </a:pPr>
+            <a:r>
+              <a:rPr lang="en-US" sz="1200" i="1" dirty="0">
+                <a:solidFill>
+                  <a:srgbClr val="FFFFFF"/>
+                </a:solidFill>
+                <a:latin typeface="Calibri" pitchFamily="34" charset="0"/>
+                <a:ea typeface="Calibri" pitchFamily="34" charset="-122"/>
+                <a:cs typeface="Calibri" pitchFamily="34" charset="-120"/>
+              </a:rPr>
+              <a:t>"I didn't just sort donations — I noticed a new volunteer wasn't sure of the process, so I showed them how we label items and checked in with them through the shift. I made sure the stockroom was tidy for the next team before I left."</a:t>
             </a:r>
             <a:endParaRPr lang="en-US" sz="1200" dirty="0"/>
           </a:p>
@@ -2616,130 +2698,66 @@
       </p:sp>
       <p:sp>
         <p:nvSpPr>
-          <p:cNvPr id="15" name="Text 12"/>
-          <p:cNvSpPr/>
-          <p:nvPr/>
-        </p:nvSpPr>
-        <p:spPr>
-          <a:xfrm>
-            <a:off x="8275320" y="1947672"/>
-            <a:ext cx="3291840" cy="676656"/>
-          </a:xfrm>
-          <a:prstGeom prst="rect">
-            <a:avLst/>
-          </a:prstGeom>
-          <a:noFill/>
-          <a:ln/>
-        </p:spPr>
-        <p:txBody>
-          <a:bodyPr wrap="square" rtlCol="0" anchor="ctr"/>
-          <a:lstStyle/>
-          <a:p>
-            <a:pPr indent="0" marL="0">
-              <a:buNone/>
-            </a:pPr>
-            <a:r>
-              <a:rPr lang="en-US" sz="1100" dirty="0">
-                <a:solidFill>
-                  <a:srgbClr val="2A2A2A"/>
-                </a:solidFill>
-                <a:latin typeface="Calibri" pitchFamily="34" charset="0"/>
-                <a:ea typeface="Calibri" pitchFamily="34" charset="-122"/>
-                <a:cs typeface="Calibri" pitchFamily="34" charset="-120"/>
-              </a:rPr>
-              <a:t>Different backgrounds getting on well together</a:t>
-            </a:r>
-            <a:endParaRPr lang="en-US" sz="1100" dirty="0"/>
-          </a:p>
-        </p:txBody>
-      </p:sp>
-      <p:sp>
-        <p:nvSpPr>
-          <p:cNvPr id="16" name="Shape 13"/>
-          <p:cNvSpPr/>
-          <p:nvPr/>
-        </p:nvSpPr>
-        <p:spPr>
-          <a:xfrm>
-            <a:off x="548640" y="2734056"/>
-            <a:ext cx="5440680" cy="676656"/>
+          <p:cNvPr id="15" name="Shape 12"/>
+          <p:cNvSpPr/>
+          <p:nvPr/>
+        </p:nvSpPr>
+        <p:spPr>
+          <a:xfrm>
+            <a:off x="548640" y="5852160"/>
+            <a:ext cx="11064240" cy="548640"/>
           </a:xfrm>
           <a:prstGeom prst="roundRect">
             <a:avLst>
-              <a:gd name="adj" fmla="val 6757"/>
+              <a:gd name="adj" fmla="val 10000"/>
             </a:avLst>
           </a:prstGeom>
           <a:solidFill>
-            <a:srgbClr val="E8EEF7"/>
+            <a:srgbClr val="F0FDF4"/>
           </a:solidFill>
           <a:ln/>
         </p:spPr>
       </p:sp>
       <p:sp>
         <p:nvSpPr>
-          <p:cNvPr id="17" name="Text 14"/>
-          <p:cNvSpPr/>
-          <p:nvPr/>
-        </p:nvSpPr>
-        <p:spPr>
-          <a:xfrm>
-            <a:off x="685800" y="2734056"/>
-            <a:ext cx="1828800" cy="676656"/>
-          </a:xfrm>
-          <a:prstGeom prst="rect">
-            <a:avLst/>
-          </a:prstGeom>
-          <a:noFill/>
-          <a:ln/>
-        </p:spPr>
-        <p:txBody>
-          <a:bodyPr wrap="square" rtlCol="0" anchor="ctr"/>
-          <a:lstStyle/>
-          <a:p>
-            <a:pPr indent="0" marL="0">
-              <a:buNone/>
-            </a:pPr>
-            <a:r>
-              <a:rPr lang="en-US" sz="1200" b="1" dirty="0">
-                <a:solidFill>
-                  <a:srgbClr val="122952"/>
-                </a:solidFill>
-                <a:latin typeface="Calibri" pitchFamily="34" charset="0"/>
-                <a:ea typeface="Calibri" pitchFamily="34" charset="-122"/>
-                <a:cs typeface="Calibri" pitchFamily="34" charset="-120"/>
-              </a:rPr>
-              <a:t>Fund-raising</a:t>
-            </a:r>
-            <a:endParaRPr lang="en-US" sz="1200" dirty="0"/>
-          </a:p>
-        </p:txBody>
-      </p:sp>
-      <p:sp>
-        <p:nvSpPr>
-          <p:cNvPr id="18" name="Text 15"/>
-          <p:cNvSpPr/>
-          <p:nvPr/>
-        </p:nvSpPr>
-        <p:spPr>
-          <a:xfrm>
-            <a:off x="2560320" y="2734056"/>
-            <a:ext cx="3291840" cy="676656"/>
-          </a:xfrm>
-          <a:prstGeom prst="rect">
-            <a:avLst/>
-          </a:prstGeom>
-          <a:noFill/>
-          <a:ln/>
-        </p:spPr>
-        <p:txBody>
-          <a:bodyPr wrap="square" rtlCol="0" anchor="ctr"/>
-          <a:lstStyle/>
-          <a:p>
-            <a:pPr indent="0" marL="0">
-              <a:buNone/>
-            </a:pPr>
-            <a:r>
-              <a:rPr lang="en-US" sz="1100" dirty="0">
+          <p:cNvPr id="16" name="Text 13"/>
+          <p:cNvSpPr/>
+          <p:nvPr/>
+        </p:nvSpPr>
+        <p:spPr>
+          <a:xfrm>
+            <a:off x="822960" y="5916168"/>
+            <a:ext cx="10515600" cy="411480"/>
+          </a:xfrm>
+          <a:prstGeom prst="rect">
+            <a:avLst/>
+          </a:prstGeom>
+          <a:noFill/>
+          <a:ln/>
+        </p:spPr>
+        <p:txBody>
+          <a:bodyPr wrap="square" rtlCol="0" anchor="ctr"/>
+          <a:lstStyle/>
+          <a:p>
+            <a:pPr indent="0" marL="0">
+              <a:buNone/>
+            </a:pPr>
+            <a:r>
+              <a:rPr lang="en-US" sz="1250" b="1" dirty="0">
+                <a:solidFill>
+                  <a:srgbClr val="16A34A"/>
+                </a:solidFill>
+                <a:latin typeface="Calibri" pitchFamily="34" charset="0"/>
+                <a:ea typeface="Calibri" pitchFamily="34" charset="-122"/>
+                <a:cs typeface="Calibri" pitchFamily="34" charset="-120"/>
+              </a:rPr>
+              <a:t>Notice:  </a:t>
+            </a:r>
+            <a:pPr indent="0" marL="0">
+              <a:buNone/>
+            </a:pPr>
+            <a:r>
+              <a:rPr lang="en-US" sz="1250" dirty="0">
                 <a:solidFill>
                   <a:srgbClr val="2A2A2A"/>
                 </a:solidFill>
@@ -2747,515 +2765,15 @@
                 <a:ea typeface="Calibri" pitchFamily="34" charset="-122"/>
                 <a:cs typeface="Calibri" pitchFamily="34" charset="-120"/>
               </a:rPr>
-              <a:t>Collecting money to support a cause</a:t>
-            </a:r>
-            <a:endParaRPr lang="en-US" sz="1100" dirty="0"/>
-          </a:p>
-        </p:txBody>
-      </p:sp>
-      <p:sp>
-        <p:nvSpPr>
-          <p:cNvPr id="19" name="Shape 16"/>
-          <p:cNvSpPr/>
-          <p:nvPr/>
-        </p:nvSpPr>
-        <p:spPr>
-          <a:xfrm>
-            <a:off x="6263640" y="2734056"/>
-            <a:ext cx="5440680" cy="676656"/>
-          </a:xfrm>
-          <a:prstGeom prst="roundRect">
-            <a:avLst>
-              <a:gd name="adj" fmla="val 6757"/>
-            </a:avLst>
-          </a:prstGeom>
-          <a:solidFill>
-            <a:srgbClr val="E8EEF7"/>
-          </a:solidFill>
-          <a:ln/>
-        </p:spPr>
-      </p:sp>
-      <p:sp>
-        <p:nvSpPr>
-          <p:cNvPr id="20" name="Text 17"/>
-          <p:cNvSpPr/>
-          <p:nvPr/>
-        </p:nvSpPr>
-        <p:spPr>
-          <a:xfrm>
-            <a:off x="6400800" y="2734056"/>
-            <a:ext cx="1828800" cy="676656"/>
-          </a:xfrm>
-          <a:prstGeom prst="rect">
-            <a:avLst/>
-          </a:prstGeom>
-          <a:noFill/>
-          <a:ln/>
-        </p:spPr>
-        <p:txBody>
-          <a:bodyPr wrap="square" rtlCol="0" anchor="ctr"/>
-          <a:lstStyle/>
-          <a:p>
-            <a:pPr indent="0" marL="0">
-              <a:buNone/>
-            </a:pPr>
-            <a:r>
-              <a:rPr lang="en-US" sz="1200" b="1" dirty="0">
-                <a:solidFill>
-                  <a:srgbClr val="122952"/>
-                </a:solidFill>
-                <a:latin typeface="Calibri" pitchFamily="34" charset="0"/>
-                <a:ea typeface="Calibri" pitchFamily="34" charset="-122"/>
-                <a:cs typeface="Calibri" pitchFamily="34" charset="-120"/>
-              </a:rPr>
-              <a:t>Commitment</a:t>
-            </a:r>
-            <a:endParaRPr lang="en-US" sz="1200" dirty="0"/>
-          </a:p>
-        </p:txBody>
-      </p:sp>
-      <p:sp>
-        <p:nvSpPr>
-          <p:cNvPr id="21" name="Text 18"/>
-          <p:cNvSpPr/>
-          <p:nvPr/>
-        </p:nvSpPr>
-        <p:spPr>
-          <a:xfrm>
-            <a:off x="8275320" y="2734056"/>
-            <a:ext cx="3291840" cy="676656"/>
-          </a:xfrm>
-          <a:prstGeom prst="rect">
-            <a:avLst/>
-          </a:prstGeom>
-          <a:noFill/>
-          <a:ln/>
-        </p:spPr>
-        <p:txBody>
-          <a:bodyPr wrap="square" rtlCol="0" anchor="ctr"/>
-          <a:lstStyle/>
-          <a:p>
-            <a:pPr indent="0" marL="0">
-              <a:buNone/>
-            </a:pPr>
-            <a:r>
-              <a:rPr lang="en-US" sz="1100" dirty="0">
-                <a:solidFill>
-                  <a:srgbClr val="2A2A2A"/>
-                </a:solidFill>
-                <a:latin typeface="Calibri" pitchFamily="34" charset="0"/>
-                <a:ea typeface="Calibri" pitchFamily="34" charset="-122"/>
-                <a:cs typeface="Calibri" pitchFamily="34" charset="-120"/>
-              </a:rPr>
-              <a:t>Turning up reliably and trying your best</a:t>
-            </a:r>
-            <a:endParaRPr lang="en-US" sz="1100" dirty="0"/>
-          </a:p>
-        </p:txBody>
-      </p:sp>
-      <p:sp>
-        <p:nvSpPr>
-          <p:cNvPr id="22" name="Shape 19"/>
-          <p:cNvSpPr/>
-          <p:nvPr/>
-        </p:nvSpPr>
-        <p:spPr>
-          <a:xfrm>
-            <a:off x="548640" y="3520440"/>
-            <a:ext cx="5440680" cy="676656"/>
-          </a:xfrm>
-          <a:prstGeom prst="roundRect">
-            <a:avLst>
-              <a:gd name="adj" fmla="val 6757"/>
-            </a:avLst>
-          </a:prstGeom>
-          <a:solidFill>
-            <a:srgbClr val="F7F9FC"/>
-          </a:solidFill>
-          <a:ln/>
-        </p:spPr>
-      </p:sp>
-      <p:sp>
-        <p:nvSpPr>
-          <p:cNvPr id="23" name="Text 20"/>
-          <p:cNvSpPr/>
-          <p:nvPr/>
-        </p:nvSpPr>
-        <p:spPr>
-          <a:xfrm>
-            <a:off x="685800" y="3520440"/>
-            <a:ext cx="1828800" cy="676656"/>
-          </a:xfrm>
-          <a:prstGeom prst="rect">
-            <a:avLst/>
-          </a:prstGeom>
-          <a:noFill/>
-          <a:ln/>
-        </p:spPr>
-        <p:txBody>
-          <a:bodyPr wrap="square" rtlCol="0" anchor="ctr"/>
-          <a:lstStyle/>
-          <a:p>
-            <a:pPr indent="0" marL="0">
-              <a:buNone/>
-            </a:pPr>
-            <a:r>
-              <a:rPr lang="en-US" sz="1200" b="1" dirty="0">
-                <a:solidFill>
-                  <a:srgbClr val="122952"/>
-                </a:solidFill>
-                <a:latin typeface="Calibri" pitchFamily="34" charset="0"/>
-                <a:ea typeface="Calibri" pitchFamily="34" charset="-122"/>
-                <a:cs typeface="Calibri" pitchFamily="34" charset="-120"/>
-              </a:rPr>
-              <a:t>Reliability</a:t>
-            </a:r>
-            <a:endParaRPr lang="en-US" sz="1200" dirty="0"/>
-          </a:p>
-        </p:txBody>
-      </p:sp>
-      <p:sp>
-        <p:nvSpPr>
-          <p:cNvPr id="24" name="Text 21"/>
-          <p:cNvSpPr/>
-          <p:nvPr/>
-        </p:nvSpPr>
-        <p:spPr>
-          <a:xfrm>
-            <a:off x="2560320" y="3520440"/>
-            <a:ext cx="3291840" cy="676656"/>
-          </a:xfrm>
-          <a:prstGeom prst="rect">
-            <a:avLst/>
-          </a:prstGeom>
-          <a:noFill/>
-          <a:ln/>
-        </p:spPr>
-        <p:txBody>
-          <a:bodyPr wrap="square" rtlCol="0" anchor="ctr"/>
-          <a:lstStyle/>
-          <a:p>
-            <a:pPr indent="0" marL="0">
-              <a:buNone/>
-            </a:pPr>
-            <a:r>
-              <a:rPr lang="en-US" sz="1100" dirty="0">
-                <a:solidFill>
-                  <a:srgbClr val="2A2A2A"/>
-                </a:solidFill>
-                <a:latin typeface="Calibri" pitchFamily="34" charset="0"/>
-                <a:ea typeface="Calibri" pitchFamily="34" charset="-122"/>
-                <a:cs typeface="Calibri" pitchFamily="34" charset="-120"/>
-              </a:rPr>
-              <a:t>Others can depend on you</a:t>
-            </a:r>
-            <a:endParaRPr lang="en-US" sz="1100" dirty="0"/>
-          </a:p>
-        </p:txBody>
-      </p:sp>
-      <p:sp>
-        <p:nvSpPr>
-          <p:cNvPr id="25" name="Shape 22"/>
-          <p:cNvSpPr/>
-          <p:nvPr/>
-        </p:nvSpPr>
-        <p:spPr>
-          <a:xfrm>
-            <a:off x="6263640" y="3520440"/>
-            <a:ext cx="5440680" cy="676656"/>
-          </a:xfrm>
-          <a:prstGeom prst="roundRect">
-            <a:avLst>
-              <a:gd name="adj" fmla="val 6757"/>
-            </a:avLst>
-          </a:prstGeom>
-          <a:solidFill>
-            <a:srgbClr val="F7F9FC"/>
-          </a:solidFill>
-          <a:ln/>
-        </p:spPr>
-      </p:sp>
-      <p:sp>
-        <p:nvSpPr>
-          <p:cNvPr id="26" name="Text 23"/>
-          <p:cNvSpPr/>
-          <p:nvPr/>
-        </p:nvSpPr>
-        <p:spPr>
-          <a:xfrm>
-            <a:off x="6400800" y="3520440"/>
-            <a:ext cx="1828800" cy="676656"/>
-          </a:xfrm>
-          <a:prstGeom prst="rect">
-            <a:avLst/>
-          </a:prstGeom>
-          <a:noFill/>
-          <a:ln/>
-        </p:spPr>
-        <p:txBody>
-          <a:bodyPr wrap="square" rtlCol="0" anchor="ctr"/>
-          <a:lstStyle/>
-          <a:p>
-            <a:pPr indent="0" marL="0">
-              <a:buNone/>
-            </a:pPr>
-            <a:r>
-              <a:rPr lang="en-US" sz="1200" b="1" dirty="0">
-                <a:solidFill>
-                  <a:srgbClr val="122952"/>
-                </a:solidFill>
-                <a:latin typeface="Calibri" pitchFamily="34" charset="0"/>
-                <a:ea typeface="Calibri" pitchFamily="34" charset="-122"/>
-                <a:cs typeface="Calibri" pitchFamily="34" charset="-120"/>
-              </a:rPr>
-              <a:t>Self-management</a:t>
-            </a:r>
-            <a:endParaRPr lang="en-US" sz="1200" dirty="0"/>
-          </a:p>
-        </p:txBody>
-      </p:sp>
-      <p:sp>
-        <p:nvSpPr>
-          <p:cNvPr id="27" name="Text 24"/>
-          <p:cNvSpPr/>
-          <p:nvPr/>
-        </p:nvSpPr>
-        <p:spPr>
-          <a:xfrm>
-            <a:off x="8275320" y="3520440"/>
-            <a:ext cx="3291840" cy="676656"/>
-          </a:xfrm>
-          <a:prstGeom prst="rect">
-            <a:avLst/>
-          </a:prstGeom>
-          <a:noFill/>
-          <a:ln/>
-        </p:spPr>
-        <p:txBody>
-          <a:bodyPr wrap="square" rtlCol="0" anchor="ctr"/>
-          <a:lstStyle/>
-          <a:p>
-            <a:pPr indent="0" marL="0">
-              <a:buNone/>
-            </a:pPr>
-            <a:r>
-              <a:rPr lang="en-US" sz="1100" dirty="0">
-                <a:solidFill>
-                  <a:srgbClr val="2A2A2A"/>
-                </a:solidFill>
-                <a:latin typeface="Calibri" pitchFamily="34" charset="0"/>
-                <a:ea typeface="Calibri" pitchFamily="34" charset="-122"/>
-                <a:cs typeface="Calibri" pitchFamily="34" charset="-120"/>
-              </a:rPr>
-              <a:t>Organising yourself without being told</a:t>
-            </a:r>
-            <a:endParaRPr lang="en-US" sz="1100" dirty="0"/>
-          </a:p>
-        </p:txBody>
-      </p:sp>
-      <p:sp>
-        <p:nvSpPr>
-          <p:cNvPr id="28" name="Shape 25"/>
-          <p:cNvSpPr/>
-          <p:nvPr/>
-        </p:nvSpPr>
-        <p:spPr>
-          <a:xfrm>
-            <a:off x="548640" y="4306824"/>
-            <a:ext cx="5440680" cy="676656"/>
-          </a:xfrm>
-          <a:prstGeom prst="roundRect">
-            <a:avLst>
-              <a:gd name="adj" fmla="val 6757"/>
-            </a:avLst>
-          </a:prstGeom>
-          <a:solidFill>
-            <a:srgbClr val="E8EEF7"/>
-          </a:solidFill>
-          <a:ln/>
-        </p:spPr>
-      </p:sp>
-      <p:sp>
-        <p:nvSpPr>
-          <p:cNvPr id="29" name="Text 26"/>
-          <p:cNvSpPr/>
-          <p:nvPr/>
-        </p:nvSpPr>
-        <p:spPr>
-          <a:xfrm>
-            <a:off x="685800" y="4306824"/>
-            <a:ext cx="1828800" cy="676656"/>
-          </a:xfrm>
-          <a:prstGeom prst="rect">
-            <a:avLst/>
-          </a:prstGeom>
-          <a:noFill/>
-          <a:ln/>
-        </p:spPr>
-        <p:txBody>
-          <a:bodyPr wrap="square" rtlCol="0" anchor="ctr"/>
-          <a:lstStyle/>
-          <a:p>
-            <a:pPr indent="0" marL="0">
-              <a:buNone/>
-            </a:pPr>
-            <a:r>
-              <a:rPr lang="en-US" sz="1200" b="1" dirty="0">
-                <a:solidFill>
-                  <a:srgbClr val="122952"/>
-                </a:solidFill>
-                <a:latin typeface="Calibri" pitchFamily="34" charset="0"/>
-                <a:ea typeface="Calibri" pitchFamily="34" charset="-122"/>
-                <a:cs typeface="Calibri" pitchFamily="34" charset="-120"/>
-              </a:rPr>
-              <a:t>Witness statement</a:t>
-            </a:r>
-            <a:endParaRPr lang="en-US" sz="1200" dirty="0"/>
-          </a:p>
-        </p:txBody>
-      </p:sp>
-      <p:sp>
-        <p:nvSpPr>
-          <p:cNvPr id="30" name="Text 27"/>
-          <p:cNvSpPr/>
-          <p:nvPr/>
-        </p:nvSpPr>
-        <p:spPr>
-          <a:xfrm>
-            <a:off x="2560320" y="4306824"/>
-            <a:ext cx="3291840" cy="676656"/>
-          </a:xfrm>
-          <a:prstGeom prst="rect">
-            <a:avLst/>
-          </a:prstGeom>
-          <a:noFill/>
-          <a:ln/>
-        </p:spPr>
-        <p:txBody>
-          <a:bodyPr wrap="square" rtlCol="0" anchor="ctr"/>
-          <a:lstStyle/>
-          <a:p>
-            <a:pPr indent="0" marL="0">
-              <a:buNone/>
-            </a:pPr>
-            <a:r>
-              <a:rPr lang="en-US" sz="1100" dirty="0">
-                <a:solidFill>
-                  <a:srgbClr val="2A2A2A"/>
-                </a:solidFill>
-                <a:latin typeface="Calibri" pitchFamily="34" charset="0"/>
-                <a:ea typeface="Calibri" pitchFamily="34" charset="-122"/>
-                <a:cs typeface="Calibri" pitchFamily="34" charset="-120"/>
-              </a:rPr>
-              <a:t>Signed record confirming your contribution</a:t>
-            </a:r>
-            <a:endParaRPr lang="en-US" sz="1100" dirty="0"/>
-          </a:p>
-        </p:txBody>
-      </p:sp>
-      <p:sp>
-        <p:nvSpPr>
-          <p:cNvPr id="31" name="Shape 28"/>
-          <p:cNvSpPr/>
-          <p:nvPr/>
-        </p:nvSpPr>
-        <p:spPr>
-          <a:xfrm>
-            <a:off x="6263640" y="4306824"/>
-            <a:ext cx="5440680" cy="676656"/>
-          </a:xfrm>
-          <a:prstGeom prst="roundRect">
-            <a:avLst>
-              <a:gd name="adj" fmla="val 6757"/>
-            </a:avLst>
-          </a:prstGeom>
-          <a:solidFill>
-            <a:srgbClr val="E8EEF7"/>
-          </a:solidFill>
-          <a:ln/>
-        </p:spPr>
-      </p:sp>
-      <p:sp>
-        <p:nvSpPr>
-          <p:cNvPr id="32" name="Text 29"/>
-          <p:cNvSpPr/>
-          <p:nvPr/>
-        </p:nvSpPr>
-        <p:spPr>
-          <a:xfrm>
-            <a:off x="6400800" y="4306824"/>
-            <a:ext cx="1828800" cy="676656"/>
-          </a:xfrm>
-          <a:prstGeom prst="rect">
-            <a:avLst/>
-          </a:prstGeom>
-          <a:noFill/>
-          <a:ln/>
-        </p:spPr>
-        <p:txBody>
-          <a:bodyPr wrap="square" rtlCol="0" anchor="ctr"/>
-          <a:lstStyle/>
-          <a:p>
-            <a:pPr indent="0" marL="0">
-              <a:buNone/>
-            </a:pPr>
-            <a:r>
-              <a:rPr lang="en-US" sz="1200" b="1" dirty="0">
-                <a:solidFill>
-                  <a:srgbClr val="122952"/>
-                </a:solidFill>
-                <a:latin typeface="Calibri" pitchFamily="34" charset="0"/>
-                <a:ea typeface="Calibri" pitchFamily="34" charset="-122"/>
-                <a:cs typeface="Calibri" pitchFamily="34" charset="-120"/>
-              </a:rPr>
-              <a:t>Research log</a:t>
-            </a:r>
-            <a:endParaRPr lang="en-US" sz="1200" dirty="0"/>
-          </a:p>
-        </p:txBody>
-      </p:sp>
-      <p:sp>
-        <p:nvSpPr>
-          <p:cNvPr id="33" name="Text 30"/>
-          <p:cNvSpPr/>
-          <p:nvPr/>
-        </p:nvSpPr>
-        <p:spPr>
-          <a:xfrm>
-            <a:off x="8275320" y="4306824"/>
-            <a:ext cx="3291840" cy="676656"/>
-          </a:xfrm>
-          <a:prstGeom prst="rect">
-            <a:avLst/>
-          </a:prstGeom>
-          <a:noFill/>
-          <a:ln/>
-        </p:spPr>
-        <p:txBody>
-          <a:bodyPr wrap="square" rtlCol="0" anchor="ctr"/>
-          <a:lstStyle/>
-          <a:p>
-            <a:pPr indent="0" marL="0">
-              <a:buNone/>
-            </a:pPr>
-            <a:r>
-              <a:rPr lang="en-US" sz="1100" dirty="0">
-                <a:solidFill>
-                  <a:srgbClr val="2A2A2A"/>
-                </a:solidFill>
-                <a:latin typeface="Calibri" pitchFamily="34" charset="0"/>
-                <a:ea typeface="Calibri" pitchFamily="34" charset="-122"/>
-                <a:cs typeface="Calibri" pitchFamily="34" charset="-120"/>
-              </a:rPr>
-              <a:t>Record of sources used and info found</a:t>
-            </a:r>
-            <a:endParaRPr lang="en-US" sz="1100" dirty="0"/>
-          </a:p>
-        </p:txBody>
-      </p:sp>
-      <p:sp>
-        <p:nvSpPr>
-          <p:cNvPr id="34" name="Shape 31"/>
+              <a:t>Distinction isn't longer — it shows Priya taking responsibility for someone else, not just doing her own task.</a:t>
+            </a:r>
+            <a:endParaRPr lang="en-US" sz="1250" dirty="0"/>
+          </a:p>
+        </p:txBody>
+      </p:sp>
+      <p:sp>
+        <p:nvSpPr>
+          <p:cNvPr id="17" name="Shape 14"/>
           <p:cNvSpPr/>
           <p:nvPr/>
         </p:nvSpPr>
@@ -3275,7 +2793,7 @@
       </p:sp>
       <p:sp>
         <p:nvSpPr>
-          <p:cNvPr id="35" name="Text 32"/>
+          <p:cNvPr id="18" name="Text 15"/>
           <p:cNvSpPr/>
           <p:nvPr/>
         </p:nvSpPr>
@@ -3314,7 +2832,7 @@
       </p:sp>
       <p:sp>
         <p:nvSpPr>
-          <p:cNvPr id="36" name="Text 33"/>
+          <p:cNvPr id="19" name="Text 16"/>
           <p:cNvSpPr/>
           <p:nvPr/>
         </p:nvSpPr>
@@ -3345,7 +2863,7 @@
                 <a:ea typeface="Calibri" pitchFamily="34" charset="-122"/>
                 <a:cs typeface="Calibri" pitchFamily="34" charset="-120"/>
               </a:rPr>
-              <a:t>Revision Summary</a:t>
+              <a:t>Knowledge Hub 5 — Model Reflection</a:t>
             </a:r>
             <a:endParaRPr lang="en-US" sz="1000" dirty="0"/>
           </a:p>
@@ -3362,13 +2880,6 @@
 <file path=ppt/slides/slide11.xml><?xml version="1.0" encoding="utf-8"?>
 <p:sld xmlns:a="http://schemas.openxmlformats.org/drawingml/2006/main" xmlns:r="http://schemas.openxmlformats.org/officeDocument/2006/relationships" xmlns:p="http://schemas.openxmlformats.org/presentationml/2006/main">
   <p:cSld name="Slide 11">
-    <p:bg>
-      <p:bgPr>
-        <a:solidFill>
-          <a:srgbClr val="122952"/>
-        </a:solidFill>
-      </p:bgPr>
-    </p:bg>
     <p:spTree>
       <p:nvGrpSpPr>
         <p:cNvPr id="1" name=""/>
@@ -3399,6 +2910,1212 @@
         </p:blipFill>
         <p:spPr>
           <a:xfrm>
+            <a:off x="11109960" y="228600"/>
+            <a:ext cx="777240" cy="548640"/>
+          </a:xfrm>
+          <a:prstGeom prst="rect">
+            <a:avLst/>
+          </a:prstGeom>
+        </p:spPr>
+      </p:pic>
+      <p:sp>
+        <p:nvSpPr>
+          <p:cNvPr id="3" name="Text 0"/>
+          <p:cNvSpPr/>
+          <p:nvPr/>
+        </p:nvSpPr>
+        <p:spPr>
+          <a:xfrm>
+            <a:off x="548640" y="320040"/>
+            <a:ext cx="8869680" cy="548640"/>
+          </a:xfrm>
+          <a:prstGeom prst="rect">
+            <a:avLst/>
+          </a:prstGeom>
+          <a:noFill/>
+          <a:ln/>
+        </p:spPr>
+        <p:txBody>
+          <a:bodyPr wrap="square" rtlCol="0" anchor="ctr"/>
+          <a:lstStyle/>
+          <a:p>
+            <a:pPr indent="0" marL="0">
+              <a:buNone/>
+            </a:pPr>
+            <a:r>
+              <a:rPr lang="en-US" sz="2800" b="1" dirty="0">
+                <a:solidFill>
+                  <a:srgbClr val="122952"/>
+                </a:solidFill>
+                <a:latin typeface="Calibri" pitchFamily="34" charset="0"/>
+                <a:ea typeface="Calibri" pitchFamily="34" charset="-122"/>
+                <a:cs typeface="Calibri" pitchFamily="34" charset="-120"/>
+              </a:rPr>
+              <a:t>Revision — Key Terms</a:t>
+            </a:r>
+            <a:endParaRPr lang="en-US" sz="2800" dirty="0"/>
+          </a:p>
+        </p:txBody>
+      </p:sp>
+      <p:sp>
+        <p:nvSpPr>
+          <p:cNvPr id="4" name="Shape 1"/>
+          <p:cNvSpPr/>
+          <p:nvPr/>
+        </p:nvSpPr>
+        <p:spPr>
+          <a:xfrm>
+            <a:off x="548640" y="1161288"/>
+            <a:ext cx="5440680" cy="676656"/>
+          </a:xfrm>
+          <a:prstGeom prst="roundRect">
+            <a:avLst>
+              <a:gd name="adj" fmla="val 6757"/>
+            </a:avLst>
+          </a:prstGeom>
+          <a:solidFill>
+            <a:srgbClr val="E8EEF7"/>
+          </a:solidFill>
+          <a:ln/>
+        </p:spPr>
+      </p:sp>
+      <p:sp>
+        <p:nvSpPr>
+          <p:cNvPr id="5" name="Text 2"/>
+          <p:cNvSpPr/>
+          <p:nvPr/>
+        </p:nvSpPr>
+        <p:spPr>
+          <a:xfrm>
+            <a:off x="685800" y="1161288"/>
+            <a:ext cx="1828800" cy="676656"/>
+          </a:xfrm>
+          <a:prstGeom prst="rect">
+            <a:avLst/>
+          </a:prstGeom>
+          <a:noFill/>
+          <a:ln/>
+        </p:spPr>
+        <p:txBody>
+          <a:bodyPr wrap="square" rtlCol="0" anchor="ctr"/>
+          <a:lstStyle/>
+          <a:p>
+            <a:pPr indent="0" marL="0">
+              <a:buNone/>
+            </a:pPr>
+            <a:r>
+              <a:rPr lang="en-US" sz="1200" b="1" dirty="0">
+                <a:solidFill>
+                  <a:srgbClr val="122952"/>
+                </a:solidFill>
+                <a:latin typeface="Calibri" pitchFamily="34" charset="0"/>
+                <a:ea typeface="Calibri" pitchFamily="34" charset="-122"/>
+                <a:cs typeface="Calibri" pitchFamily="34" charset="-120"/>
+              </a:rPr>
+              <a:t>Volunteer</a:t>
+            </a:r>
+            <a:endParaRPr lang="en-US" sz="1200" dirty="0"/>
+          </a:p>
+        </p:txBody>
+      </p:sp>
+      <p:sp>
+        <p:nvSpPr>
+          <p:cNvPr id="6" name="Text 3"/>
+          <p:cNvSpPr/>
+          <p:nvPr/>
+        </p:nvSpPr>
+        <p:spPr>
+          <a:xfrm>
+            <a:off x="2560320" y="1161288"/>
+            <a:ext cx="3291840" cy="676656"/>
+          </a:xfrm>
+          <a:prstGeom prst="rect">
+            <a:avLst/>
+          </a:prstGeom>
+          <a:noFill/>
+          <a:ln/>
+        </p:spPr>
+        <p:txBody>
+          <a:bodyPr wrap="square" rtlCol="0" anchor="ctr"/>
+          <a:lstStyle/>
+          <a:p>
+            <a:pPr indent="0" marL="0">
+              <a:buNone/>
+            </a:pPr>
+            <a:r>
+              <a:rPr lang="en-US" sz="1100" dirty="0">
+                <a:solidFill>
+                  <a:srgbClr val="2A2A2A"/>
+                </a:solidFill>
+                <a:latin typeface="Calibri" pitchFamily="34" charset="0"/>
+                <a:ea typeface="Calibri" pitchFamily="34" charset="-122"/>
+                <a:cs typeface="Calibri" pitchFamily="34" charset="-120"/>
+              </a:rPr>
+              <a:t>Gives time to help without being paid</a:t>
+            </a:r>
+            <a:endParaRPr lang="en-US" sz="1100" dirty="0"/>
+          </a:p>
+        </p:txBody>
+      </p:sp>
+      <p:sp>
+        <p:nvSpPr>
+          <p:cNvPr id="7" name="Shape 4"/>
+          <p:cNvSpPr/>
+          <p:nvPr/>
+        </p:nvSpPr>
+        <p:spPr>
+          <a:xfrm>
+            <a:off x="6263640" y="1161288"/>
+            <a:ext cx="5440680" cy="676656"/>
+          </a:xfrm>
+          <a:prstGeom prst="roundRect">
+            <a:avLst>
+              <a:gd name="adj" fmla="val 6757"/>
+            </a:avLst>
+          </a:prstGeom>
+          <a:solidFill>
+            <a:srgbClr val="E8EEF7"/>
+          </a:solidFill>
+          <a:ln/>
+        </p:spPr>
+      </p:sp>
+      <p:sp>
+        <p:nvSpPr>
+          <p:cNvPr id="8" name="Text 5"/>
+          <p:cNvSpPr/>
+          <p:nvPr/>
+        </p:nvSpPr>
+        <p:spPr>
+          <a:xfrm>
+            <a:off x="6400800" y="1161288"/>
+            <a:ext cx="1828800" cy="676656"/>
+          </a:xfrm>
+          <a:prstGeom prst="rect">
+            <a:avLst/>
+          </a:prstGeom>
+          <a:noFill/>
+          <a:ln/>
+        </p:spPr>
+        <p:txBody>
+          <a:bodyPr wrap="square" rtlCol="0" anchor="ctr"/>
+          <a:lstStyle/>
+          <a:p>
+            <a:pPr indent="0" marL="0">
+              <a:buNone/>
+            </a:pPr>
+            <a:r>
+              <a:rPr lang="en-US" sz="1200" b="1" dirty="0">
+                <a:solidFill>
+                  <a:srgbClr val="122952"/>
+                </a:solidFill>
+                <a:latin typeface="Calibri" pitchFamily="34" charset="0"/>
+                <a:ea typeface="Calibri" pitchFamily="34" charset="-122"/>
+                <a:cs typeface="Calibri" pitchFamily="34" charset="-120"/>
+              </a:rPr>
+              <a:t>Voluntary organisation</a:t>
+            </a:r>
+            <a:endParaRPr lang="en-US" sz="1200" dirty="0"/>
+          </a:p>
+        </p:txBody>
+      </p:sp>
+      <p:sp>
+        <p:nvSpPr>
+          <p:cNvPr id="9" name="Text 6"/>
+          <p:cNvSpPr/>
+          <p:nvPr/>
+        </p:nvSpPr>
+        <p:spPr>
+          <a:xfrm>
+            <a:off x="8275320" y="1161288"/>
+            <a:ext cx="3291840" cy="676656"/>
+          </a:xfrm>
+          <a:prstGeom prst="rect">
+            <a:avLst/>
+          </a:prstGeom>
+          <a:noFill/>
+          <a:ln/>
+        </p:spPr>
+        <p:txBody>
+          <a:bodyPr wrap="square" rtlCol="0" anchor="ctr"/>
+          <a:lstStyle/>
+          <a:p>
+            <a:pPr indent="0" marL="0">
+              <a:buNone/>
+            </a:pPr>
+            <a:r>
+              <a:rPr lang="en-US" sz="1100" dirty="0">
+                <a:solidFill>
+                  <a:srgbClr val="2A2A2A"/>
+                </a:solidFill>
+                <a:latin typeface="Calibri" pitchFamily="34" charset="0"/>
+                <a:ea typeface="Calibri" pitchFamily="34" charset="-122"/>
+                <a:cs typeface="Calibri" pitchFamily="34" charset="-120"/>
+              </a:rPr>
+              <a:t>Group/charity organising unpaid work</a:t>
+            </a:r>
+            <a:endParaRPr lang="en-US" sz="1100" dirty="0"/>
+          </a:p>
+        </p:txBody>
+      </p:sp>
+      <p:sp>
+        <p:nvSpPr>
+          <p:cNvPr id="10" name="Shape 7"/>
+          <p:cNvSpPr/>
+          <p:nvPr/>
+        </p:nvSpPr>
+        <p:spPr>
+          <a:xfrm>
+            <a:off x="548640" y="1947672"/>
+            <a:ext cx="5440680" cy="676656"/>
+          </a:xfrm>
+          <a:prstGeom prst="roundRect">
+            <a:avLst>
+              <a:gd name="adj" fmla="val 6757"/>
+            </a:avLst>
+          </a:prstGeom>
+          <a:solidFill>
+            <a:srgbClr val="F7F9FC"/>
+          </a:solidFill>
+          <a:ln/>
+        </p:spPr>
+      </p:sp>
+      <p:sp>
+        <p:nvSpPr>
+          <p:cNvPr id="11" name="Text 8"/>
+          <p:cNvSpPr/>
+          <p:nvPr/>
+        </p:nvSpPr>
+        <p:spPr>
+          <a:xfrm>
+            <a:off x="685800" y="1947672"/>
+            <a:ext cx="1828800" cy="676656"/>
+          </a:xfrm>
+          <a:prstGeom prst="rect">
+            <a:avLst/>
+          </a:prstGeom>
+          <a:noFill/>
+          <a:ln/>
+        </p:spPr>
+        <p:txBody>
+          <a:bodyPr wrap="square" rtlCol="0" anchor="ctr"/>
+          <a:lstStyle/>
+          <a:p>
+            <a:pPr indent="0" marL="0">
+              <a:buNone/>
+            </a:pPr>
+            <a:r>
+              <a:rPr lang="en-US" sz="1200" b="1" dirty="0">
+                <a:solidFill>
+                  <a:srgbClr val="122952"/>
+                </a:solidFill>
+                <a:latin typeface="Calibri" pitchFamily="34" charset="0"/>
+                <a:ea typeface="Calibri" pitchFamily="34" charset="-122"/>
+                <a:cs typeface="Calibri" pitchFamily="34" charset="-120"/>
+              </a:rPr>
+              <a:t>Positive impact</a:t>
+            </a:r>
+            <a:endParaRPr lang="en-US" sz="1200" dirty="0"/>
+          </a:p>
+        </p:txBody>
+      </p:sp>
+      <p:sp>
+        <p:nvSpPr>
+          <p:cNvPr id="12" name="Text 9"/>
+          <p:cNvSpPr/>
+          <p:nvPr/>
+        </p:nvSpPr>
+        <p:spPr>
+          <a:xfrm>
+            <a:off x="2560320" y="1947672"/>
+            <a:ext cx="3291840" cy="676656"/>
+          </a:xfrm>
+          <a:prstGeom prst="rect">
+            <a:avLst/>
+          </a:prstGeom>
+          <a:noFill/>
+          <a:ln/>
+        </p:spPr>
+        <p:txBody>
+          <a:bodyPr wrap="square" rtlCol="0" anchor="ctr"/>
+          <a:lstStyle/>
+          <a:p>
+            <a:pPr indent="0" marL="0">
+              <a:buNone/>
+            </a:pPr>
+            <a:r>
+              <a:rPr lang="en-US" sz="1100" dirty="0">
+                <a:solidFill>
+                  <a:srgbClr val="2A2A2A"/>
+                </a:solidFill>
+                <a:latin typeface="Calibri" pitchFamily="34" charset="0"/>
+                <a:ea typeface="Calibri" pitchFamily="34" charset="-122"/>
+                <a:cs typeface="Calibri" pitchFamily="34" charset="-120"/>
+              </a:rPr>
+              <a:t>A good or helpful effect on people/community</a:t>
+            </a:r>
+            <a:endParaRPr lang="en-US" sz="1100" dirty="0"/>
+          </a:p>
+        </p:txBody>
+      </p:sp>
+      <p:sp>
+        <p:nvSpPr>
+          <p:cNvPr id="13" name="Shape 10"/>
+          <p:cNvSpPr/>
+          <p:nvPr/>
+        </p:nvSpPr>
+        <p:spPr>
+          <a:xfrm>
+            <a:off x="6263640" y="1947672"/>
+            <a:ext cx="5440680" cy="676656"/>
+          </a:xfrm>
+          <a:prstGeom prst="roundRect">
+            <a:avLst>
+              <a:gd name="adj" fmla="val 6757"/>
+            </a:avLst>
+          </a:prstGeom>
+          <a:solidFill>
+            <a:srgbClr val="F7F9FC"/>
+          </a:solidFill>
+          <a:ln/>
+        </p:spPr>
+      </p:sp>
+      <p:sp>
+        <p:nvSpPr>
+          <p:cNvPr id="14" name="Text 11"/>
+          <p:cNvSpPr/>
+          <p:nvPr/>
+        </p:nvSpPr>
+        <p:spPr>
+          <a:xfrm>
+            <a:off x="6400800" y="1947672"/>
+            <a:ext cx="1828800" cy="676656"/>
+          </a:xfrm>
+          <a:prstGeom prst="rect">
+            <a:avLst/>
+          </a:prstGeom>
+          <a:noFill/>
+          <a:ln/>
+        </p:spPr>
+        <p:txBody>
+          <a:bodyPr wrap="square" rtlCol="0" anchor="ctr"/>
+          <a:lstStyle/>
+          <a:p>
+            <a:pPr indent="0" marL="0">
+              <a:buNone/>
+            </a:pPr>
+            <a:r>
+              <a:rPr lang="en-US" sz="1200" b="1" dirty="0">
+                <a:solidFill>
+                  <a:srgbClr val="122952"/>
+                </a:solidFill>
+                <a:latin typeface="Calibri" pitchFamily="34" charset="0"/>
+                <a:ea typeface="Calibri" pitchFamily="34" charset="-122"/>
+                <a:cs typeface="Calibri" pitchFamily="34" charset="-120"/>
+              </a:rPr>
+              <a:t>Community cohesion</a:t>
+            </a:r>
+            <a:endParaRPr lang="en-US" sz="1200" dirty="0"/>
+          </a:p>
+        </p:txBody>
+      </p:sp>
+      <p:sp>
+        <p:nvSpPr>
+          <p:cNvPr id="15" name="Text 12"/>
+          <p:cNvSpPr/>
+          <p:nvPr/>
+        </p:nvSpPr>
+        <p:spPr>
+          <a:xfrm>
+            <a:off x="8275320" y="1947672"/>
+            <a:ext cx="3291840" cy="676656"/>
+          </a:xfrm>
+          <a:prstGeom prst="rect">
+            <a:avLst/>
+          </a:prstGeom>
+          <a:noFill/>
+          <a:ln/>
+        </p:spPr>
+        <p:txBody>
+          <a:bodyPr wrap="square" rtlCol="0" anchor="ctr"/>
+          <a:lstStyle/>
+          <a:p>
+            <a:pPr indent="0" marL="0">
+              <a:buNone/>
+            </a:pPr>
+            <a:r>
+              <a:rPr lang="en-US" sz="1100" dirty="0">
+                <a:solidFill>
+                  <a:srgbClr val="2A2A2A"/>
+                </a:solidFill>
+                <a:latin typeface="Calibri" pitchFamily="34" charset="0"/>
+                <a:ea typeface="Calibri" pitchFamily="34" charset="-122"/>
+                <a:cs typeface="Calibri" pitchFamily="34" charset="-120"/>
+              </a:rPr>
+              <a:t>Different backgrounds getting on well together</a:t>
+            </a:r>
+            <a:endParaRPr lang="en-US" sz="1100" dirty="0"/>
+          </a:p>
+        </p:txBody>
+      </p:sp>
+      <p:sp>
+        <p:nvSpPr>
+          <p:cNvPr id="16" name="Shape 13"/>
+          <p:cNvSpPr/>
+          <p:nvPr/>
+        </p:nvSpPr>
+        <p:spPr>
+          <a:xfrm>
+            <a:off x="548640" y="2734056"/>
+            <a:ext cx="5440680" cy="676656"/>
+          </a:xfrm>
+          <a:prstGeom prst="roundRect">
+            <a:avLst>
+              <a:gd name="adj" fmla="val 6757"/>
+            </a:avLst>
+          </a:prstGeom>
+          <a:solidFill>
+            <a:srgbClr val="E8EEF7"/>
+          </a:solidFill>
+          <a:ln/>
+        </p:spPr>
+      </p:sp>
+      <p:sp>
+        <p:nvSpPr>
+          <p:cNvPr id="17" name="Text 14"/>
+          <p:cNvSpPr/>
+          <p:nvPr/>
+        </p:nvSpPr>
+        <p:spPr>
+          <a:xfrm>
+            <a:off x="685800" y="2734056"/>
+            <a:ext cx="1828800" cy="676656"/>
+          </a:xfrm>
+          <a:prstGeom prst="rect">
+            <a:avLst/>
+          </a:prstGeom>
+          <a:noFill/>
+          <a:ln/>
+        </p:spPr>
+        <p:txBody>
+          <a:bodyPr wrap="square" rtlCol="0" anchor="ctr"/>
+          <a:lstStyle/>
+          <a:p>
+            <a:pPr indent="0" marL="0">
+              <a:buNone/>
+            </a:pPr>
+            <a:r>
+              <a:rPr lang="en-US" sz="1200" b="1" dirty="0">
+                <a:solidFill>
+                  <a:srgbClr val="122952"/>
+                </a:solidFill>
+                <a:latin typeface="Calibri" pitchFamily="34" charset="0"/>
+                <a:ea typeface="Calibri" pitchFamily="34" charset="-122"/>
+                <a:cs typeface="Calibri" pitchFamily="34" charset="-120"/>
+              </a:rPr>
+              <a:t>Fund-raising</a:t>
+            </a:r>
+            <a:endParaRPr lang="en-US" sz="1200" dirty="0"/>
+          </a:p>
+        </p:txBody>
+      </p:sp>
+      <p:sp>
+        <p:nvSpPr>
+          <p:cNvPr id="18" name="Text 15"/>
+          <p:cNvSpPr/>
+          <p:nvPr/>
+        </p:nvSpPr>
+        <p:spPr>
+          <a:xfrm>
+            <a:off x="2560320" y="2734056"/>
+            <a:ext cx="3291840" cy="676656"/>
+          </a:xfrm>
+          <a:prstGeom prst="rect">
+            <a:avLst/>
+          </a:prstGeom>
+          <a:noFill/>
+          <a:ln/>
+        </p:spPr>
+        <p:txBody>
+          <a:bodyPr wrap="square" rtlCol="0" anchor="ctr"/>
+          <a:lstStyle/>
+          <a:p>
+            <a:pPr indent="0" marL="0">
+              <a:buNone/>
+            </a:pPr>
+            <a:r>
+              <a:rPr lang="en-US" sz="1100" dirty="0">
+                <a:solidFill>
+                  <a:srgbClr val="2A2A2A"/>
+                </a:solidFill>
+                <a:latin typeface="Calibri" pitchFamily="34" charset="0"/>
+                <a:ea typeface="Calibri" pitchFamily="34" charset="-122"/>
+                <a:cs typeface="Calibri" pitchFamily="34" charset="-120"/>
+              </a:rPr>
+              <a:t>Collecting money to support a cause</a:t>
+            </a:r>
+            <a:endParaRPr lang="en-US" sz="1100" dirty="0"/>
+          </a:p>
+        </p:txBody>
+      </p:sp>
+      <p:sp>
+        <p:nvSpPr>
+          <p:cNvPr id="19" name="Shape 16"/>
+          <p:cNvSpPr/>
+          <p:nvPr/>
+        </p:nvSpPr>
+        <p:spPr>
+          <a:xfrm>
+            <a:off x="6263640" y="2734056"/>
+            <a:ext cx="5440680" cy="676656"/>
+          </a:xfrm>
+          <a:prstGeom prst="roundRect">
+            <a:avLst>
+              <a:gd name="adj" fmla="val 6757"/>
+            </a:avLst>
+          </a:prstGeom>
+          <a:solidFill>
+            <a:srgbClr val="E8EEF7"/>
+          </a:solidFill>
+          <a:ln/>
+        </p:spPr>
+      </p:sp>
+      <p:sp>
+        <p:nvSpPr>
+          <p:cNvPr id="20" name="Text 17"/>
+          <p:cNvSpPr/>
+          <p:nvPr/>
+        </p:nvSpPr>
+        <p:spPr>
+          <a:xfrm>
+            <a:off x="6400800" y="2734056"/>
+            <a:ext cx="1828800" cy="676656"/>
+          </a:xfrm>
+          <a:prstGeom prst="rect">
+            <a:avLst/>
+          </a:prstGeom>
+          <a:noFill/>
+          <a:ln/>
+        </p:spPr>
+        <p:txBody>
+          <a:bodyPr wrap="square" rtlCol="0" anchor="ctr"/>
+          <a:lstStyle/>
+          <a:p>
+            <a:pPr indent="0" marL="0">
+              <a:buNone/>
+            </a:pPr>
+            <a:r>
+              <a:rPr lang="en-US" sz="1200" b="1" dirty="0">
+                <a:solidFill>
+                  <a:srgbClr val="122952"/>
+                </a:solidFill>
+                <a:latin typeface="Calibri" pitchFamily="34" charset="0"/>
+                <a:ea typeface="Calibri" pitchFamily="34" charset="-122"/>
+                <a:cs typeface="Calibri" pitchFamily="34" charset="-120"/>
+              </a:rPr>
+              <a:t>Commitment</a:t>
+            </a:r>
+            <a:endParaRPr lang="en-US" sz="1200" dirty="0"/>
+          </a:p>
+        </p:txBody>
+      </p:sp>
+      <p:sp>
+        <p:nvSpPr>
+          <p:cNvPr id="21" name="Text 18"/>
+          <p:cNvSpPr/>
+          <p:nvPr/>
+        </p:nvSpPr>
+        <p:spPr>
+          <a:xfrm>
+            <a:off x="8275320" y="2734056"/>
+            <a:ext cx="3291840" cy="676656"/>
+          </a:xfrm>
+          <a:prstGeom prst="rect">
+            <a:avLst/>
+          </a:prstGeom>
+          <a:noFill/>
+          <a:ln/>
+        </p:spPr>
+        <p:txBody>
+          <a:bodyPr wrap="square" rtlCol="0" anchor="ctr"/>
+          <a:lstStyle/>
+          <a:p>
+            <a:pPr indent="0" marL="0">
+              <a:buNone/>
+            </a:pPr>
+            <a:r>
+              <a:rPr lang="en-US" sz="1100" dirty="0">
+                <a:solidFill>
+                  <a:srgbClr val="2A2A2A"/>
+                </a:solidFill>
+                <a:latin typeface="Calibri" pitchFamily="34" charset="0"/>
+                <a:ea typeface="Calibri" pitchFamily="34" charset="-122"/>
+                <a:cs typeface="Calibri" pitchFamily="34" charset="-120"/>
+              </a:rPr>
+              <a:t>Turning up reliably and trying your best</a:t>
+            </a:r>
+            <a:endParaRPr lang="en-US" sz="1100" dirty="0"/>
+          </a:p>
+        </p:txBody>
+      </p:sp>
+      <p:sp>
+        <p:nvSpPr>
+          <p:cNvPr id="22" name="Shape 19"/>
+          <p:cNvSpPr/>
+          <p:nvPr/>
+        </p:nvSpPr>
+        <p:spPr>
+          <a:xfrm>
+            <a:off x="548640" y="3520440"/>
+            <a:ext cx="5440680" cy="676656"/>
+          </a:xfrm>
+          <a:prstGeom prst="roundRect">
+            <a:avLst>
+              <a:gd name="adj" fmla="val 6757"/>
+            </a:avLst>
+          </a:prstGeom>
+          <a:solidFill>
+            <a:srgbClr val="F7F9FC"/>
+          </a:solidFill>
+          <a:ln/>
+        </p:spPr>
+      </p:sp>
+      <p:sp>
+        <p:nvSpPr>
+          <p:cNvPr id="23" name="Text 20"/>
+          <p:cNvSpPr/>
+          <p:nvPr/>
+        </p:nvSpPr>
+        <p:spPr>
+          <a:xfrm>
+            <a:off x="685800" y="3520440"/>
+            <a:ext cx="1828800" cy="676656"/>
+          </a:xfrm>
+          <a:prstGeom prst="rect">
+            <a:avLst/>
+          </a:prstGeom>
+          <a:noFill/>
+          <a:ln/>
+        </p:spPr>
+        <p:txBody>
+          <a:bodyPr wrap="square" rtlCol="0" anchor="ctr"/>
+          <a:lstStyle/>
+          <a:p>
+            <a:pPr indent="0" marL="0">
+              <a:buNone/>
+            </a:pPr>
+            <a:r>
+              <a:rPr lang="en-US" sz="1200" b="1" dirty="0">
+                <a:solidFill>
+                  <a:srgbClr val="122952"/>
+                </a:solidFill>
+                <a:latin typeface="Calibri" pitchFamily="34" charset="0"/>
+                <a:ea typeface="Calibri" pitchFamily="34" charset="-122"/>
+                <a:cs typeface="Calibri" pitchFamily="34" charset="-120"/>
+              </a:rPr>
+              <a:t>Reliability</a:t>
+            </a:r>
+            <a:endParaRPr lang="en-US" sz="1200" dirty="0"/>
+          </a:p>
+        </p:txBody>
+      </p:sp>
+      <p:sp>
+        <p:nvSpPr>
+          <p:cNvPr id="24" name="Text 21"/>
+          <p:cNvSpPr/>
+          <p:nvPr/>
+        </p:nvSpPr>
+        <p:spPr>
+          <a:xfrm>
+            <a:off x="2560320" y="3520440"/>
+            <a:ext cx="3291840" cy="676656"/>
+          </a:xfrm>
+          <a:prstGeom prst="rect">
+            <a:avLst/>
+          </a:prstGeom>
+          <a:noFill/>
+          <a:ln/>
+        </p:spPr>
+        <p:txBody>
+          <a:bodyPr wrap="square" rtlCol="0" anchor="ctr"/>
+          <a:lstStyle/>
+          <a:p>
+            <a:pPr indent="0" marL="0">
+              <a:buNone/>
+            </a:pPr>
+            <a:r>
+              <a:rPr lang="en-US" sz="1100" dirty="0">
+                <a:solidFill>
+                  <a:srgbClr val="2A2A2A"/>
+                </a:solidFill>
+                <a:latin typeface="Calibri" pitchFamily="34" charset="0"/>
+                <a:ea typeface="Calibri" pitchFamily="34" charset="-122"/>
+                <a:cs typeface="Calibri" pitchFamily="34" charset="-120"/>
+              </a:rPr>
+              <a:t>Others can depend on you</a:t>
+            </a:r>
+            <a:endParaRPr lang="en-US" sz="1100" dirty="0"/>
+          </a:p>
+        </p:txBody>
+      </p:sp>
+      <p:sp>
+        <p:nvSpPr>
+          <p:cNvPr id="25" name="Shape 22"/>
+          <p:cNvSpPr/>
+          <p:nvPr/>
+        </p:nvSpPr>
+        <p:spPr>
+          <a:xfrm>
+            <a:off x="6263640" y="3520440"/>
+            <a:ext cx="5440680" cy="676656"/>
+          </a:xfrm>
+          <a:prstGeom prst="roundRect">
+            <a:avLst>
+              <a:gd name="adj" fmla="val 6757"/>
+            </a:avLst>
+          </a:prstGeom>
+          <a:solidFill>
+            <a:srgbClr val="F7F9FC"/>
+          </a:solidFill>
+          <a:ln/>
+        </p:spPr>
+      </p:sp>
+      <p:sp>
+        <p:nvSpPr>
+          <p:cNvPr id="26" name="Text 23"/>
+          <p:cNvSpPr/>
+          <p:nvPr/>
+        </p:nvSpPr>
+        <p:spPr>
+          <a:xfrm>
+            <a:off x="6400800" y="3520440"/>
+            <a:ext cx="1828800" cy="676656"/>
+          </a:xfrm>
+          <a:prstGeom prst="rect">
+            <a:avLst/>
+          </a:prstGeom>
+          <a:noFill/>
+          <a:ln/>
+        </p:spPr>
+        <p:txBody>
+          <a:bodyPr wrap="square" rtlCol="0" anchor="ctr"/>
+          <a:lstStyle/>
+          <a:p>
+            <a:pPr indent="0" marL="0">
+              <a:buNone/>
+            </a:pPr>
+            <a:r>
+              <a:rPr lang="en-US" sz="1200" b="1" dirty="0">
+                <a:solidFill>
+                  <a:srgbClr val="122952"/>
+                </a:solidFill>
+                <a:latin typeface="Calibri" pitchFamily="34" charset="0"/>
+                <a:ea typeface="Calibri" pitchFamily="34" charset="-122"/>
+                <a:cs typeface="Calibri" pitchFamily="34" charset="-120"/>
+              </a:rPr>
+              <a:t>Self-management</a:t>
+            </a:r>
+            <a:endParaRPr lang="en-US" sz="1200" dirty="0"/>
+          </a:p>
+        </p:txBody>
+      </p:sp>
+      <p:sp>
+        <p:nvSpPr>
+          <p:cNvPr id="27" name="Text 24"/>
+          <p:cNvSpPr/>
+          <p:nvPr/>
+        </p:nvSpPr>
+        <p:spPr>
+          <a:xfrm>
+            <a:off x="8275320" y="3520440"/>
+            <a:ext cx="3291840" cy="676656"/>
+          </a:xfrm>
+          <a:prstGeom prst="rect">
+            <a:avLst/>
+          </a:prstGeom>
+          <a:noFill/>
+          <a:ln/>
+        </p:spPr>
+        <p:txBody>
+          <a:bodyPr wrap="square" rtlCol="0" anchor="ctr"/>
+          <a:lstStyle/>
+          <a:p>
+            <a:pPr indent="0" marL="0">
+              <a:buNone/>
+            </a:pPr>
+            <a:r>
+              <a:rPr lang="en-US" sz="1100" dirty="0">
+                <a:solidFill>
+                  <a:srgbClr val="2A2A2A"/>
+                </a:solidFill>
+                <a:latin typeface="Calibri" pitchFamily="34" charset="0"/>
+                <a:ea typeface="Calibri" pitchFamily="34" charset="-122"/>
+                <a:cs typeface="Calibri" pitchFamily="34" charset="-120"/>
+              </a:rPr>
+              <a:t>Organising yourself without being told</a:t>
+            </a:r>
+            <a:endParaRPr lang="en-US" sz="1100" dirty="0"/>
+          </a:p>
+        </p:txBody>
+      </p:sp>
+      <p:sp>
+        <p:nvSpPr>
+          <p:cNvPr id="28" name="Shape 25"/>
+          <p:cNvSpPr/>
+          <p:nvPr/>
+        </p:nvSpPr>
+        <p:spPr>
+          <a:xfrm>
+            <a:off x="548640" y="4306824"/>
+            <a:ext cx="5440680" cy="676656"/>
+          </a:xfrm>
+          <a:prstGeom prst="roundRect">
+            <a:avLst>
+              <a:gd name="adj" fmla="val 6757"/>
+            </a:avLst>
+          </a:prstGeom>
+          <a:solidFill>
+            <a:srgbClr val="E8EEF7"/>
+          </a:solidFill>
+          <a:ln/>
+        </p:spPr>
+      </p:sp>
+      <p:sp>
+        <p:nvSpPr>
+          <p:cNvPr id="29" name="Text 26"/>
+          <p:cNvSpPr/>
+          <p:nvPr/>
+        </p:nvSpPr>
+        <p:spPr>
+          <a:xfrm>
+            <a:off x="685800" y="4306824"/>
+            <a:ext cx="1828800" cy="676656"/>
+          </a:xfrm>
+          <a:prstGeom prst="rect">
+            <a:avLst/>
+          </a:prstGeom>
+          <a:noFill/>
+          <a:ln/>
+        </p:spPr>
+        <p:txBody>
+          <a:bodyPr wrap="square" rtlCol="0" anchor="ctr"/>
+          <a:lstStyle/>
+          <a:p>
+            <a:pPr indent="0" marL="0">
+              <a:buNone/>
+            </a:pPr>
+            <a:r>
+              <a:rPr lang="en-US" sz="1200" b="1" dirty="0">
+                <a:solidFill>
+                  <a:srgbClr val="122952"/>
+                </a:solidFill>
+                <a:latin typeface="Calibri" pitchFamily="34" charset="0"/>
+                <a:ea typeface="Calibri" pitchFamily="34" charset="-122"/>
+                <a:cs typeface="Calibri" pitchFamily="34" charset="-120"/>
+              </a:rPr>
+              <a:t>Witness statement</a:t>
+            </a:r>
+            <a:endParaRPr lang="en-US" sz="1200" dirty="0"/>
+          </a:p>
+        </p:txBody>
+      </p:sp>
+      <p:sp>
+        <p:nvSpPr>
+          <p:cNvPr id="30" name="Text 27"/>
+          <p:cNvSpPr/>
+          <p:nvPr/>
+        </p:nvSpPr>
+        <p:spPr>
+          <a:xfrm>
+            <a:off x="2560320" y="4306824"/>
+            <a:ext cx="3291840" cy="676656"/>
+          </a:xfrm>
+          <a:prstGeom prst="rect">
+            <a:avLst/>
+          </a:prstGeom>
+          <a:noFill/>
+          <a:ln/>
+        </p:spPr>
+        <p:txBody>
+          <a:bodyPr wrap="square" rtlCol="0" anchor="ctr"/>
+          <a:lstStyle/>
+          <a:p>
+            <a:pPr indent="0" marL="0">
+              <a:buNone/>
+            </a:pPr>
+            <a:r>
+              <a:rPr lang="en-US" sz="1100" dirty="0">
+                <a:solidFill>
+                  <a:srgbClr val="2A2A2A"/>
+                </a:solidFill>
+                <a:latin typeface="Calibri" pitchFamily="34" charset="0"/>
+                <a:ea typeface="Calibri" pitchFamily="34" charset="-122"/>
+                <a:cs typeface="Calibri" pitchFamily="34" charset="-120"/>
+              </a:rPr>
+              <a:t>Signed record confirming your contribution</a:t>
+            </a:r>
+            <a:endParaRPr lang="en-US" sz="1100" dirty="0"/>
+          </a:p>
+        </p:txBody>
+      </p:sp>
+      <p:sp>
+        <p:nvSpPr>
+          <p:cNvPr id="31" name="Shape 28"/>
+          <p:cNvSpPr/>
+          <p:nvPr/>
+        </p:nvSpPr>
+        <p:spPr>
+          <a:xfrm>
+            <a:off x="6263640" y="4306824"/>
+            <a:ext cx="5440680" cy="676656"/>
+          </a:xfrm>
+          <a:prstGeom prst="roundRect">
+            <a:avLst>
+              <a:gd name="adj" fmla="val 6757"/>
+            </a:avLst>
+          </a:prstGeom>
+          <a:solidFill>
+            <a:srgbClr val="E8EEF7"/>
+          </a:solidFill>
+          <a:ln/>
+        </p:spPr>
+      </p:sp>
+      <p:sp>
+        <p:nvSpPr>
+          <p:cNvPr id="32" name="Text 29"/>
+          <p:cNvSpPr/>
+          <p:nvPr/>
+        </p:nvSpPr>
+        <p:spPr>
+          <a:xfrm>
+            <a:off x="6400800" y="4306824"/>
+            <a:ext cx="1828800" cy="676656"/>
+          </a:xfrm>
+          <a:prstGeom prst="rect">
+            <a:avLst/>
+          </a:prstGeom>
+          <a:noFill/>
+          <a:ln/>
+        </p:spPr>
+        <p:txBody>
+          <a:bodyPr wrap="square" rtlCol="0" anchor="ctr"/>
+          <a:lstStyle/>
+          <a:p>
+            <a:pPr indent="0" marL="0">
+              <a:buNone/>
+            </a:pPr>
+            <a:r>
+              <a:rPr lang="en-US" sz="1200" b="1" dirty="0">
+                <a:solidFill>
+                  <a:srgbClr val="122952"/>
+                </a:solidFill>
+                <a:latin typeface="Calibri" pitchFamily="34" charset="0"/>
+                <a:ea typeface="Calibri" pitchFamily="34" charset="-122"/>
+                <a:cs typeface="Calibri" pitchFamily="34" charset="-120"/>
+              </a:rPr>
+              <a:t>Research log</a:t>
+            </a:r>
+            <a:endParaRPr lang="en-US" sz="1200" dirty="0"/>
+          </a:p>
+        </p:txBody>
+      </p:sp>
+      <p:sp>
+        <p:nvSpPr>
+          <p:cNvPr id="33" name="Text 30"/>
+          <p:cNvSpPr/>
+          <p:nvPr/>
+        </p:nvSpPr>
+        <p:spPr>
+          <a:xfrm>
+            <a:off x="8275320" y="4306824"/>
+            <a:ext cx="3291840" cy="676656"/>
+          </a:xfrm>
+          <a:prstGeom prst="rect">
+            <a:avLst/>
+          </a:prstGeom>
+          <a:noFill/>
+          <a:ln/>
+        </p:spPr>
+        <p:txBody>
+          <a:bodyPr wrap="square" rtlCol="0" anchor="ctr"/>
+          <a:lstStyle/>
+          <a:p>
+            <a:pPr indent="0" marL="0">
+              <a:buNone/>
+            </a:pPr>
+            <a:r>
+              <a:rPr lang="en-US" sz="1100" dirty="0">
+                <a:solidFill>
+                  <a:srgbClr val="2A2A2A"/>
+                </a:solidFill>
+                <a:latin typeface="Calibri" pitchFamily="34" charset="0"/>
+                <a:ea typeface="Calibri" pitchFamily="34" charset="-122"/>
+                <a:cs typeface="Calibri" pitchFamily="34" charset="-120"/>
+              </a:rPr>
+              <a:t>Record of sources used and info found</a:t>
+            </a:r>
+            <a:endParaRPr lang="en-US" sz="1100" dirty="0"/>
+          </a:p>
+        </p:txBody>
+      </p:sp>
+      <p:sp>
+        <p:nvSpPr>
+          <p:cNvPr id="34" name="Shape 31"/>
+          <p:cNvSpPr/>
+          <p:nvPr/>
+        </p:nvSpPr>
+        <p:spPr>
+          <a:xfrm>
+            <a:off x="0" y="6537960"/>
+            <a:ext cx="12188952" cy="320040"/>
+          </a:xfrm>
+          <a:prstGeom prst="rect">
+            <a:avLst/>
+          </a:prstGeom>
+          <a:solidFill>
+            <a:srgbClr val="1B3A6B"/>
+          </a:solidFill>
+          <a:ln/>
+        </p:spPr>
+      </p:sp>
+      <p:sp>
+        <p:nvSpPr>
+          <p:cNvPr id="35" name="Text 32"/>
+          <p:cNvSpPr/>
+          <p:nvPr/>
+        </p:nvSpPr>
+        <p:spPr>
+          <a:xfrm>
+            <a:off x="274320" y="6537960"/>
+            <a:ext cx="3657600" cy="320040"/>
+          </a:xfrm>
+          <a:prstGeom prst="rect">
+            <a:avLst/>
+          </a:prstGeom>
+          <a:noFill/>
+          <a:ln/>
+        </p:spPr>
+        <p:txBody>
+          <a:bodyPr wrap="square" rtlCol="0" anchor="ctr"/>
+          <a:lstStyle/>
+          <a:p>
+            <a:pPr indent="0" marL="0">
+              <a:buNone/>
+            </a:pPr>
+            <a:r>
+              <a:rPr lang="en-US" sz="1000" dirty="0">
+                <a:solidFill>
+                  <a:srgbClr val="FFFFFF"/>
+                </a:solidFill>
+                <a:latin typeface="Calibri" pitchFamily="34" charset="0"/>
+                <a:ea typeface="Calibri" pitchFamily="34" charset="-122"/>
+                <a:cs typeface="Calibri" pitchFamily="34" charset="-120"/>
+              </a:rPr>
+              <a:t>PS11</a:t>
+            </a:r>
+            <a:endParaRPr lang="en-US" sz="1000" dirty="0"/>
+          </a:p>
+        </p:txBody>
+      </p:sp>
+      <p:sp>
+        <p:nvSpPr>
+          <p:cNvPr id="36" name="Text 33"/>
+          <p:cNvSpPr/>
+          <p:nvPr/>
+        </p:nvSpPr>
+        <p:spPr>
+          <a:xfrm>
+            <a:off x="7772400" y="6537960"/>
+            <a:ext cx="4114800" cy="320040"/>
+          </a:xfrm>
+          <a:prstGeom prst="rect">
+            <a:avLst/>
+          </a:prstGeom>
+          <a:noFill/>
+          <a:ln/>
+        </p:spPr>
+        <p:txBody>
+          <a:bodyPr wrap="square" rtlCol="0" anchor="ctr"/>
+          <a:lstStyle/>
+          <a:p>
+            <a:pPr algn="r" indent="0" marL="0">
+              <a:buNone/>
+            </a:pPr>
+            <a:r>
+              <a:rPr lang="en-US" sz="1000" dirty="0">
+                <a:solidFill>
+                  <a:srgbClr val="FFFFFF"/>
+                </a:solidFill>
+                <a:latin typeface="Calibri" pitchFamily="34" charset="0"/>
+                <a:ea typeface="Calibri" pitchFamily="34" charset="-122"/>
+                <a:cs typeface="Calibri" pitchFamily="34" charset="-120"/>
+              </a:rPr>
+              <a:t>Revision Summary</a:t>
+            </a:r>
+            <a:endParaRPr lang="en-US" sz="1000" dirty="0"/>
+          </a:p>
+        </p:txBody>
+      </p:sp>
+    </p:spTree>
+  </p:cSld>
+  <p:clrMapOvr>
+    <a:masterClrMapping/>
+  </p:clrMapOvr>
+</p:sld>
+</file>
+
+<file path=ppt/slides/slide12.xml><?xml version="1.0" encoding="utf-8"?>
+<p:sld xmlns:a="http://schemas.openxmlformats.org/drawingml/2006/main" xmlns:r="http://schemas.openxmlformats.org/officeDocument/2006/relationships" xmlns:p="http://schemas.openxmlformats.org/presentationml/2006/main">
+  <p:cSld name="Slide 12">
+    <p:spTree>
+      <p:nvGrpSpPr>
+        <p:cNvPr id="1" name=""/>
+        <p:cNvGrpSpPr/>
+        <p:nvPr/>
+      </p:nvGrpSpPr>
+      <p:grpSpPr>
+        <a:xfrm>
+          <a:off x="0" y="0"/>
+          <a:ext cx="0" cy="0"/>
+          <a:chOff x="0" y="0"/>
+          <a:chExt cx="0" cy="0"/>
+        </a:xfrm>
+      </p:grpSpPr>
+      <p:sp>
+        <p:nvSpPr>
+          <p:cNvPr id="2" name="Shape 0"/>
+          <p:cNvSpPr/>
+          <p:nvPr/>
+        </p:nvSpPr>
+        <p:spPr>
+          <a:xfrm>
+            <a:off x="0" y="0"/>
+            <a:ext cx="12188952" cy="6858000"/>
+          </a:xfrm>
+          <a:prstGeom prst="rect">
+            <a:avLst/>
+          </a:prstGeom>
+          <a:solidFill>
+            <a:srgbClr val="122952"/>
+          </a:solidFill>
+          <a:ln/>
+        </p:spPr>
+      </p:sp>
+      <p:pic>
+        <p:nvPicPr>
+          <p:cNvPr id="3" name="Image 0" descr="preencoded.png">    </p:cNvPr>
+          <p:cNvPicPr>
+            <a:picLocks noChangeAspect="1"/>
+          </p:cNvPicPr>
+          <p:nvPr/>
+        </p:nvPicPr>
+        <p:blipFill>
+          <a:blip r:embed="rId1"/>
+          <a:stretch>
+            <a:fillRect/>
+          </a:stretch>
+        </p:blipFill>
+        <p:spPr>
+          <a:xfrm>
             <a:off x="548640" y="457200"/>
             <a:ext cx="1005840" cy="713232"/>
           </a:xfrm>
@@ -3409,7 +4126,7 @@
       </p:pic>
       <p:sp>
         <p:nvSpPr>
-          <p:cNvPr id="3" name="Text 0"/>
+          <p:cNvPr id="4" name="Text 1"/>
           <p:cNvSpPr/>
           <p:nvPr/>
         </p:nvSpPr>
@@ -3448,7 +4165,7 @@
       </p:sp>
       <p:sp>
         <p:nvSpPr>
-          <p:cNvPr id="4" name="Text 1"/>
+          <p:cNvPr id="5" name="Text 2"/>
           <p:cNvSpPr/>
           <p:nvPr/>
         </p:nvSpPr>
@@ -3487,7 +4204,7 @@
       </p:sp>
       <p:sp>
         <p:nvSpPr>
-          <p:cNvPr id="5" name="Text 2"/>
+          <p:cNvPr id="6" name="Text 3"/>
           <p:cNvSpPr/>
           <p:nvPr/>
         </p:nvSpPr>
@@ -3526,7 +4243,7 @@
       </p:sp>
       <p:sp>
         <p:nvSpPr>
-          <p:cNvPr id="6" name="Text 3"/>
+          <p:cNvPr id="7" name="Text 4"/>
           <p:cNvSpPr/>
           <p:nvPr/>
         </p:nvSpPr>
@@ -3885,7 +4602,7 @@
             </a:avLst>
           </a:prstGeom>
           <a:solidFill>
-            <a:srgbClr val="F7F9FC"/>
+            <a:srgbClr val="E8EEF7"/>
           </a:solidFill>
           <a:ln/>
         </p:spPr>
@@ -4333,13 +5050,6 @@
 <file path=ppt/slides/slide3.xml><?xml version="1.0" encoding="utf-8"?>
 <p:sld xmlns:a="http://schemas.openxmlformats.org/drawingml/2006/main" xmlns:r="http://schemas.openxmlformats.org/officeDocument/2006/relationships" xmlns:p="http://schemas.openxmlformats.org/presentationml/2006/main">
   <p:cSld name="Slide 3">
-    <p:bg>
-      <p:bgPr>
-        <a:solidFill>
-          <a:srgbClr val="122952"/>
-        </a:solidFill>
-      </p:bgPr>
-    </p:bg>
     <p:spTree>
       <p:nvGrpSpPr>
         <p:cNvPr id="1" name=""/>
@@ -4356,7 +5066,27 @@
       </p:grpSpPr>
       <p:sp>
         <p:nvSpPr>
-          <p:cNvPr id="2" name="Text 0"/>
+          <p:cNvPr id="2" name="Shape 0"/>
+          <p:cNvSpPr/>
+          <p:nvPr/>
+        </p:nvSpPr>
+        <p:spPr>
+          <a:xfrm>
+            <a:off x="0" y="0"/>
+            <a:ext cx="12188952" cy="6858000"/>
+          </a:xfrm>
+          <a:prstGeom prst="rect">
+            <a:avLst/>
+          </a:prstGeom>
+          <a:solidFill>
+            <a:srgbClr val="122952"/>
+          </a:solidFill>
+          <a:ln/>
+        </p:spPr>
+      </p:sp>
+      <p:sp>
+        <p:nvSpPr>
+          <p:cNvPr id="3" name="Text 1"/>
           <p:cNvSpPr/>
           <p:nvPr/>
         </p:nvSpPr>
@@ -4395,7 +5125,7 @@
       </p:sp>
       <p:sp>
         <p:nvSpPr>
-          <p:cNvPr id="3" name="Text 1"/>
+          <p:cNvPr id="4" name="Text 2"/>
           <p:cNvSpPr/>
           <p:nvPr/>
         </p:nvSpPr>
@@ -4434,7 +5164,7 @@
       </p:sp>
       <p:sp>
         <p:nvSpPr>
-          <p:cNvPr id="4" name="Text 2"/>
+          <p:cNvPr id="5" name="Text 3"/>
           <p:cNvSpPr/>
           <p:nvPr/>
         </p:nvSpPr>
@@ -4457,7 +5187,7 @@
               <a:buNone/>
             </a:pPr>
             <a:r>
-              <a:rPr lang="en-US" sz="3200" b="1" dirty="0">
+              <a:rPr lang="en-US" sz="3000" b="1" dirty="0">
                 <a:solidFill>
                   <a:srgbClr val="FFFFFF"/>
                 </a:solidFill>
@@ -4467,13 +5197,13 @@
               </a:rPr>
               <a:t>Find Out About a Volunteering Organisation</a:t>
             </a:r>
-            <a:endParaRPr lang="en-US" sz="3200" dirty="0"/>
-          </a:p>
-        </p:txBody>
-      </p:sp>
-      <p:sp>
-        <p:nvSpPr>
-          <p:cNvPr id="5" name="Text 3"/>
+            <a:endParaRPr lang="en-US" sz="3000" dirty="0"/>
+          </a:p>
+        </p:txBody>
+      </p:sp>
+      <p:sp>
+        <p:nvSpPr>
+          <p:cNvPr id="6" name="Text 4"/>
           <p:cNvSpPr/>
           <p:nvPr/>
         </p:nvSpPr>
@@ -4567,8 +5297,8 @@
         </p:nvSpPr>
         <p:spPr>
           <a:xfrm>
-            <a:off x="9692640" y="274320"/>
-            <a:ext cx="2148840" cy="384048"/>
+            <a:off x="9144000" y="274320"/>
+            <a:ext cx="2697480" cy="384048"/>
           </a:xfrm>
           <a:prstGeom prst="roundRect">
             <a:avLst>
@@ -4589,8 +5319,8 @@
         </p:nvSpPr>
         <p:spPr>
           <a:xfrm>
-            <a:off x="9692640" y="274320"/>
-            <a:ext cx="2148840" cy="384048"/>
+            <a:off x="9144000" y="274320"/>
+            <a:ext cx="2697480" cy="384048"/>
           </a:xfrm>
           <a:prstGeom prst="rect">
             <a:avLst/>
@@ -4629,23 +5359,23 @@
         <p:spPr>
           <a:xfrm>
             <a:off x="548640" y="320040"/>
-            <a:ext cx="8869680" cy="640080"/>
-          </a:xfrm>
-          <a:prstGeom prst="rect">
-            <a:avLst/>
-          </a:prstGeom>
-          <a:noFill/>
-          <a:ln/>
-        </p:spPr>
-        <p:txBody>
-          <a:bodyPr wrap="square" rtlCol="0" anchor="ctr"/>
-          <a:lstStyle/>
-          <a:p>
-            <a:pPr indent="0" marL="0">
-              <a:buNone/>
-            </a:pPr>
-            <a:r>
-              <a:rPr lang="en-US" sz="2600" b="1" dirty="0">
+            <a:ext cx="8595360" cy="640080"/>
+          </a:xfrm>
+          <a:prstGeom prst="rect">
+            <a:avLst/>
+          </a:prstGeom>
+          <a:noFill/>
+          <a:ln/>
+        </p:spPr>
+        <p:txBody>
+          <a:bodyPr wrap="square" rtlCol="0" anchor="ctr"/>
+          <a:lstStyle/>
+          <a:p>
+            <a:pPr indent="0" marL="0">
+              <a:buNone/>
+            </a:pPr>
+            <a:r>
+              <a:rPr lang="en-US" sz="2400" b="1" dirty="0">
                 <a:solidFill>
                   <a:srgbClr val="122952"/>
                 </a:solidFill>
@@ -4655,7 +5385,7 @@
               </a:rPr>
               <a:t>Why Volunteers Matter to the Public Services</a:t>
             </a:r>
-            <a:endParaRPr lang="en-US" sz="2600" dirty="0"/>
+            <a:endParaRPr lang="en-US" sz="2400" dirty="0"/>
           </a:p>
         </p:txBody>
       </p:sp>
@@ -5328,8 +6058,8 @@
         </p:nvSpPr>
         <p:spPr>
           <a:xfrm>
-            <a:off x="9692640" y="274320"/>
-            <a:ext cx="2148840" cy="384048"/>
+            <a:off x="9144000" y="274320"/>
+            <a:ext cx="2697480" cy="384048"/>
           </a:xfrm>
           <a:prstGeom prst="roundRect">
             <a:avLst>
@@ -5350,8 +6080,8 @@
         </p:nvSpPr>
         <p:spPr>
           <a:xfrm>
-            <a:off x="9692640" y="274320"/>
-            <a:ext cx="2148840" cy="384048"/>
+            <a:off x="9144000" y="274320"/>
+            <a:ext cx="2697480" cy="384048"/>
           </a:xfrm>
           <a:prstGeom prst="rect">
             <a:avLst/>
@@ -6265,8 +6995,8 @@
         </p:nvSpPr>
         <p:spPr>
           <a:xfrm>
-            <a:off x="9692640" y="274320"/>
-            <a:ext cx="2148840" cy="384048"/>
+            <a:off x="548640" y="274320"/>
+            <a:ext cx="2103120" cy="384048"/>
           </a:xfrm>
           <a:prstGeom prst="roundRect">
             <a:avLst>
@@ -6274,7 +7004,7 @@
             </a:avLst>
           </a:prstGeom>
           <a:solidFill>
-            <a:srgbClr val="C8A951"/>
+            <a:srgbClr val="1E40AF"/>
           </a:solidFill>
           <a:ln/>
         </p:spPr>
@@ -6287,8 +7017,8 @@
         </p:nvSpPr>
         <p:spPr>
           <a:xfrm>
-            <a:off x="9692640" y="274320"/>
-            <a:ext cx="2148840" cy="384048"/>
+            <a:off x="548640" y="274320"/>
+            <a:ext cx="2103120" cy="384048"/>
           </a:xfrm>
           <a:prstGeom prst="rect">
             <a:avLst/>
@@ -6304,15 +7034,237 @@
               <a:buNone/>
             </a:pPr>
             <a:r>
+              <a:rPr lang="en-US" sz="1100" b="1" dirty="0">
+                <a:solidFill>
+                  <a:srgbClr val="FFFFFF"/>
+                </a:solidFill>
+                <a:latin typeface="Calibri" pitchFamily="34" charset="0"/>
+                <a:ea typeface="Calibri" pitchFamily="34" charset="-122"/>
+                <a:cs typeface="Calibri" pitchFamily="34" charset="-120"/>
+              </a:rPr>
+              <a:t>WORKED EXAMPLE</a:t>
+            </a:r>
+            <a:endParaRPr lang="en-US" sz="1100" dirty="0"/>
+          </a:p>
+        </p:txBody>
+      </p:sp>
+      <p:sp>
+        <p:nvSpPr>
+          <p:cNvPr id="5" name="Text 2"/>
+          <p:cNvSpPr/>
+          <p:nvPr/>
+        </p:nvSpPr>
+        <p:spPr>
+          <a:xfrm>
+            <a:off x="548640" y="822960"/>
+            <a:ext cx="8869680" cy="640080"/>
+          </a:xfrm>
+          <a:prstGeom prst="rect">
+            <a:avLst/>
+          </a:prstGeom>
+          <a:noFill/>
+          <a:ln/>
+        </p:spPr>
+        <p:txBody>
+          <a:bodyPr wrap="square" rtlCol="0" anchor="ctr"/>
+          <a:lstStyle/>
+          <a:p>
+            <a:pPr indent="0" marL="0">
+              <a:buNone/>
+            </a:pPr>
+            <a:r>
+              <a:rPr lang="en-US" sz="2400" b="1" dirty="0">
+                <a:solidFill>
+                  <a:srgbClr val="122952"/>
+                </a:solidFill>
+                <a:latin typeface="Calibri" pitchFamily="34" charset="0"/>
+                <a:ea typeface="Calibri" pitchFamily="34" charset="-122"/>
+                <a:cs typeface="Calibri" pitchFamily="34" charset="-120"/>
+              </a:rPr>
+              <a:t>Is This a Good Source? Two to Compare</a:t>
+            </a:r>
+            <a:endParaRPr lang="en-US" sz="2400" dirty="0"/>
+          </a:p>
+        </p:txBody>
+      </p:sp>
+      <p:sp>
+        <p:nvSpPr>
+          <p:cNvPr id="6" name="Text 3"/>
+          <p:cNvSpPr/>
+          <p:nvPr/>
+        </p:nvSpPr>
+        <p:spPr>
+          <a:xfrm>
+            <a:off x="548640" y="1417320"/>
+            <a:ext cx="10789920" cy="365760"/>
+          </a:xfrm>
+          <a:prstGeom prst="rect">
+            <a:avLst/>
+          </a:prstGeom>
+          <a:noFill/>
+          <a:ln/>
+        </p:spPr>
+        <p:txBody>
+          <a:bodyPr wrap="square" rtlCol="0" anchor="ctr"/>
+          <a:lstStyle/>
+          <a:p>
+            <a:pPr indent="0" marL="0">
+              <a:buNone/>
+            </a:pPr>
+            <a:r>
+              <a:rPr lang="en-US" sz="1300" i="1" dirty="0">
+                <a:solidFill>
+                  <a:srgbClr val="6B7B8C"/>
+                </a:solidFill>
+                <a:latin typeface="Calibri" pitchFamily="34" charset="0"/>
+                <a:ea typeface="Calibri" pitchFamily="34" charset="-122"/>
+                <a:cs typeface="Calibri" pitchFamily="34" charset="-120"/>
+              </a:rPr>
+              <a:t>For A.D1 you find your own source — not every source is equally trustworthy.</a:t>
+            </a:r>
+            <a:endParaRPr lang="en-US" sz="1300" dirty="0"/>
+          </a:p>
+        </p:txBody>
+      </p:sp>
+      <p:sp>
+        <p:nvSpPr>
+          <p:cNvPr id="7" name="Shape 4"/>
+          <p:cNvSpPr/>
+          <p:nvPr/>
+        </p:nvSpPr>
+        <p:spPr>
+          <a:xfrm>
+            <a:off x="548640" y="1920240"/>
+            <a:ext cx="5349240" cy="3749040"/>
+          </a:xfrm>
+          <a:prstGeom prst="roundRect">
+            <a:avLst>
+              <a:gd name="adj" fmla="val 1951"/>
+            </a:avLst>
+          </a:prstGeom>
+          <a:solidFill>
+            <a:srgbClr val="FEF2F2"/>
+          </a:solidFill>
+          <a:ln w="12700">
+            <a:solidFill>
+              <a:srgbClr val="DC2626"/>
+            </a:solidFill>
+            <a:prstDash val="solid"/>
+          </a:ln>
+        </p:spPr>
+      </p:sp>
+      <p:sp>
+        <p:nvSpPr>
+          <p:cNvPr id="8" name="Text 5"/>
+          <p:cNvSpPr/>
+          <p:nvPr/>
+        </p:nvSpPr>
+        <p:spPr>
+          <a:xfrm>
+            <a:off x="822960" y="2103120"/>
+            <a:ext cx="4800600" cy="365760"/>
+          </a:xfrm>
+          <a:prstGeom prst="rect">
+            <a:avLst/>
+          </a:prstGeom>
+          <a:noFill/>
+          <a:ln/>
+        </p:spPr>
+        <p:txBody>
+          <a:bodyPr wrap="square" rtlCol="0" anchor="ctr"/>
+          <a:lstStyle/>
+          <a:p>
+            <a:pPr indent="0" marL="0">
+              <a:buNone/>
+            </a:pPr>
+            <a:r>
+              <a:rPr lang="en-US" sz="1500" b="1" dirty="0">
+                <a:solidFill>
+                  <a:srgbClr val="991B1B"/>
+                </a:solidFill>
+                <a:latin typeface="Calibri" pitchFamily="34" charset="0"/>
+                <a:ea typeface="Calibri" pitchFamily="34" charset="-122"/>
+                <a:cs typeface="Calibri" pitchFamily="34" charset="-120"/>
+              </a:rPr>
+              <a:t>Source A</a:t>
+            </a:r>
+            <a:endParaRPr lang="en-US" sz="1500" dirty="0"/>
+          </a:p>
+        </p:txBody>
+      </p:sp>
+      <p:sp>
+        <p:nvSpPr>
+          <p:cNvPr id="9" name="Text 6"/>
+          <p:cNvSpPr/>
+          <p:nvPr/>
+        </p:nvSpPr>
+        <p:spPr>
+          <a:xfrm>
+            <a:off x="822960" y="2514600"/>
+            <a:ext cx="4800600" cy="914400"/>
+          </a:xfrm>
+          <a:prstGeom prst="rect">
+            <a:avLst/>
+          </a:prstGeom>
+          <a:noFill/>
+          <a:ln/>
+        </p:spPr>
+        <p:txBody>
+          <a:bodyPr wrap="square" rtlCol="0" anchor="ctr"/>
+          <a:lstStyle/>
+          <a:p>
+            <a:pPr indent="0" marL="0">
+              <a:buNone/>
+            </a:pPr>
+            <a:r>
+              <a:rPr lang="en-US" sz="1250" dirty="0">
+                <a:solidFill>
+                  <a:srgbClr val="2A2A2A"/>
+                </a:solidFill>
+                <a:latin typeface="Calibri" pitchFamily="34" charset="0"/>
+                <a:ea typeface="Calibri" pitchFamily="34" charset="-122"/>
+                <a:cs typeface="Calibri" pitchFamily="34" charset="-120"/>
+              </a:rPr>
+              <a:t>A three-year-old forum post from someone claiming to have once donated to the charity, with no name or date given.</a:t>
+            </a:r>
+            <a:endParaRPr lang="en-US" sz="1250" dirty="0"/>
+          </a:p>
+        </p:txBody>
+      </p:sp>
+      <p:sp>
+        <p:nvSpPr>
+          <p:cNvPr id="10" name="Text 7"/>
+          <p:cNvSpPr/>
+          <p:nvPr/>
+        </p:nvSpPr>
+        <p:spPr>
+          <a:xfrm>
+            <a:off x="822960" y="3474720"/>
+            <a:ext cx="4800600" cy="274320"/>
+          </a:xfrm>
+          <a:prstGeom prst="rect">
+            <a:avLst/>
+          </a:prstGeom>
+          <a:noFill/>
+          <a:ln/>
+        </p:spPr>
+        <p:txBody>
+          <a:bodyPr wrap="square" rtlCol="0" anchor="ctr"/>
+          <a:lstStyle/>
+          <a:p>
+            <a:pPr indent="0" marL="0">
+              <a:buNone/>
+            </a:pPr>
+            <a:r>
               <a:rPr lang="en-US" sz="1200" b="1" dirty="0">
                 <a:solidFill>
-                  <a:srgbClr val="122952"/>
-                </a:solidFill>
-                <a:latin typeface="Calibri" pitchFamily="34" charset="0"/>
-                <a:ea typeface="Calibri" pitchFamily="34" charset="-122"/>
-                <a:cs typeface="Calibri" pitchFamily="34" charset="-120"/>
-              </a:rPr>
-              <a:t>A.P2 · A.M2 · A.D2</a:t>
+                  <a:srgbClr val="991B1B"/>
+                </a:solidFill>
+                <a:latin typeface="Calibri" pitchFamily="34" charset="0"/>
+                <a:ea typeface="Calibri" pitchFamily="34" charset="-122"/>
+                <a:cs typeface="Calibri" pitchFamily="34" charset="-120"/>
+              </a:rPr>
+              <a:t>Problems:</a:t>
             </a:r>
             <a:endParaRPr lang="en-US" sz="1200" dirty="0"/>
           </a:p>
@@ -6320,92 +7272,14 @@
       </p:sp>
       <p:sp>
         <p:nvSpPr>
-          <p:cNvPr id="5" name="Text 2"/>
-          <p:cNvSpPr/>
-          <p:nvPr/>
-        </p:nvSpPr>
-        <p:spPr>
-          <a:xfrm>
-            <a:off x="548640" y="320040"/>
-            <a:ext cx="8869680" cy="640080"/>
-          </a:xfrm>
-          <a:prstGeom prst="rect">
-            <a:avLst/>
-          </a:prstGeom>
-          <a:noFill/>
-          <a:ln/>
-        </p:spPr>
-        <p:txBody>
-          <a:bodyPr wrap="square" rtlCol="0" anchor="ctr"/>
-          <a:lstStyle/>
-          <a:p>
-            <a:pPr indent="0" marL="0">
-              <a:buNone/>
-            </a:pPr>
-            <a:r>
-              <a:rPr lang="en-US" sz="2600" b="1" dirty="0">
-                <a:solidFill>
-                  <a:srgbClr val="122952"/>
-                </a:solidFill>
-                <a:latin typeface="Calibri" pitchFamily="34" charset="0"/>
-                <a:ea typeface="Calibri" pitchFamily="34" charset="-122"/>
-                <a:cs typeface="Calibri" pitchFamily="34" charset="-120"/>
-              </a:rPr>
-              <a:t>Benefits to You and Skills You Need</a:t>
-            </a:r>
-            <a:endParaRPr lang="en-US" sz="2600" dirty="0"/>
-          </a:p>
-        </p:txBody>
-      </p:sp>
-      <p:sp>
-        <p:nvSpPr>
-          <p:cNvPr id="6" name="Text 3"/>
-          <p:cNvSpPr/>
-          <p:nvPr/>
-        </p:nvSpPr>
-        <p:spPr>
-          <a:xfrm>
-            <a:off x="548640" y="1097280"/>
-            <a:ext cx="5303520" cy="365760"/>
-          </a:xfrm>
-          <a:prstGeom prst="rect">
-            <a:avLst/>
-          </a:prstGeom>
-          <a:noFill/>
-          <a:ln/>
-        </p:spPr>
-        <p:txBody>
-          <a:bodyPr wrap="square" rtlCol="0" anchor="ctr"/>
-          <a:lstStyle/>
-          <a:p>
-            <a:pPr indent="0" marL="0">
-              <a:buNone/>
-            </a:pPr>
-            <a:r>
-              <a:rPr lang="en-US" sz="1600" b="1" dirty="0">
-                <a:solidFill>
-                  <a:srgbClr val="122952"/>
-                </a:solidFill>
-                <a:latin typeface="Calibri" pitchFamily="34" charset="0"/>
-                <a:ea typeface="Calibri" pitchFamily="34" charset="-122"/>
-                <a:cs typeface="Calibri" pitchFamily="34" charset="-120"/>
-              </a:rPr>
-              <a:t>Benefits for the individual</a:t>
-            </a:r>
-            <a:endParaRPr lang="en-US" sz="1600" dirty="0"/>
-          </a:p>
-        </p:txBody>
-      </p:sp>
-      <p:sp>
-        <p:nvSpPr>
-          <p:cNvPr id="7" name="Text 4"/>
-          <p:cNvSpPr/>
-          <p:nvPr/>
-        </p:nvSpPr>
-        <p:spPr>
-          <a:xfrm>
-            <a:off x="548640" y="1554480"/>
-            <a:ext cx="5303520" cy="457200"/>
+          <p:cNvPr id="11" name="Text 8"/>
+          <p:cNvSpPr/>
+          <p:nvPr/>
+        </p:nvSpPr>
+        <p:spPr>
+          <a:xfrm>
+            <a:off x="822960" y="3794760"/>
+            <a:ext cx="4800600" cy="365760"/>
           </a:xfrm>
           <a:prstGeom prst="rect">
             <a:avLst/>
@@ -6419,33 +7293,33 @@
           <a:p>
             <a:pPr marL="342900" indent="-342900">
               <a:buSzPct val="100000"/>
-              <a:buChar char="▪"/>
-            </a:pPr>
-            <a:r>
-              <a:rPr lang="en-US" sz="1300" dirty="0">
-                <a:solidFill>
-                  <a:srgbClr val="2A2A2A"/>
-                </a:solidFill>
-                <a:latin typeface="Calibri" pitchFamily="34" charset="0"/>
-                <a:ea typeface="Calibri" pitchFamily="34" charset="-122"/>
-                <a:cs typeface="Calibri" pitchFamily="34" charset="-120"/>
-              </a:rPr>
-              <a:t>New and improved skills</a:t>
-            </a:r>
-            <a:endParaRPr lang="en-US" sz="1300" dirty="0"/>
-          </a:p>
-        </p:txBody>
-      </p:sp>
-      <p:sp>
-        <p:nvSpPr>
-          <p:cNvPr id="8" name="Text 5"/>
-          <p:cNvSpPr/>
-          <p:nvPr/>
-        </p:nvSpPr>
-        <p:spPr>
-          <a:xfrm>
-            <a:off x="548640" y="2057400"/>
-            <a:ext cx="5303520" cy="457200"/>
+              <a:buChar char="✗"/>
+            </a:pPr>
+            <a:r>
+              <a:rPr lang="en-US" sz="1200" dirty="0">
+                <a:solidFill>
+                  <a:srgbClr val="991B1B"/>
+                </a:solidFill>
+                <a:latin typeface="Calibri" pitchFamily="34" charset="0"/>
+                <a:ea typeface="Calibri" pitchFamily="34" charset="-122"/>
+                <a:cs typeface="Calibri" pitchFamily="34" charset="-120"/>
+              </a:rPr>
+              <a:t>Anonymous — can't check who wrote it</a:t>
+            </a:r>
+            <a:endParaRPr lang="en-US" sz="1200" dirty="0"/>
+          </a:p>
+        </p:txBody>
+      </p:sp>
+      <p:sp>
+        <p:nvSpPr>
+          <p:cNvPr id="12" name="Text 9"/>
+          <p:cNvSpPr/>
+          <p:nvPr/>
+        </p:nvSpPr>
+        <p:spPr>
+          <a:xfrm>
+            <a:off x="822960" y="4206240"/>
+            <a:ext cx="4800600" cy="365760"/>
           </a:xfrm>
           <a:prstGeom prst="rect">
             <a:avLst/>
@@ -6459,33 +7333,33 @@
           <a:p>
             <a:pPr marL="342900" indent="-342900">
               <a:buSzPct val="100000"/>
-              <a:buChar char="▪"/>
-            </a:pPr>
-            <a:r>
-              <a:rPr lang="en-US" sz="1300" dirty="0">
-                <a:solidFill>
-                  <a:srgbClr val="2A2A2A"/>
-                </a:solidFill>
-                <a:latin typeface="Calibri" pitchFamily="34" charset="0"/>
-                <a:ea typeface="Calibri" pitchFamily="34" charset="-122"/>
-                <a:cs typeface="Calibri" pitchFamily="34" charset="-120"/>
-              </a:rPr>
-              <a:t>Awareness of your community</a:t>
-            </a:r>
-            <a:endParaRPr lang="en-US" sz="1300" dirty="0"/>
-          </a:p>
-        </p:txBody>
-      </p:sp>
-      <p:sp>
-        <p:nvSpPr>
-          <p:cNvPr id="9" name="Text 6"/>
-          <p:cNvSpPr/>
-          <p:nvPr/>
-        </p:nvSpPr>
-        <p:spPr>
-          <a:xfrm>
-            <a:off x="548640" y="2560320"/>
-            <a:ext cx="5303520" cy="457200"/>
+              <a:buChar char="✗"/>
+            </a:pPr>
+            <a:r>
+              <a:rPr lang="en-US" sz="1200" dirty="0">
+                <a:solidFill>
+                  <a:srgbClr val="991B1B"/>
+                </a:solidFill>
+                <a:latin typeface="Calibri" pitchFamily="34" charset="0"/>
+                <a:ea typeface="Calibri" pitchFamily="34" charset="-122"/>
+                <a:cs typeface="Calibri" pitchFamily="34" charset="-120"/>
+              </a:rPr>
+              <a:t>Old — the charity's work may have changed</a:t>
+            </a:r>
+            <a:endParaRPr lang="en-US" sz="1200" dirty="0"/>
+          </a:p>
+        </p:txBody>
+      </p:sp>
+      <p:sp>
+        <p:nvSpPr>
+          <p:cNvPr id="13" name="Text 10"/>
+          <p:cNvSpPr/>
+          <p:nvPr/>
+        </p:nvSpPr>
+        <p:spPr>
+          <a:xfrm>
+            <a:off x="822960" y="4617720"/>
+            <a:ext cx="4800600" cy="365760"/>
           </a:xfrm>
           <a:prstGeom prst="rect">
             <a:avLst/>
@@ -6499,10 +7373,115 @@
           <a:p>
             <a:pPr marL="342900" indent="-342900">
               <a:buSzPct val="100000"/>
-              <a:buChar char="▪"/>
-            </a:pPr>
-            <a:r>
-              <a:rPr lang="en-US" sz="1300" dirty="0">
+              <a:buChar char="✗"/>
+            </a:pPr>
+            <a:r>
+              <a:rPr lang="en-US" sz="1200" dirty="0">
+                <a:solidFill>
+                  <a:srgbClr val="991B1B"/>
+                </a:solidFill>
+                <a:latin typeface="Calibri" pitchFamily="34" charset="0"/>
+                <a:ea typeface="Calibri" pitchFamily="34" charset="-122"/>
+                <a:cs typeface="Calibri" pitchFamily="34" charset="-120"/>
+              </a:rPr>
+              <a:t>Personal opinion, not fact-checked</a:t>
+            </a:r>
+            <a:endParaRPr lang="en-US" sz="1200" dirty="0"/>
+          </a:p>
+        </p:txBody>
+      </p:sp>
+      <p:sp>
+        <p:nvSpPr>
+          <p:cNvPr id="14" name="Shape 11"/>
+          <p:cNvSpPr/>
+          <p:nvPr/>
+        </p:nvSpPr>
+        <p:spPr>
+          <a:xfrm>
+            <a:off x="6263640" y="1920240"/>
+            <a:ext cx="5349240" cy="3749040"/>
+          </a:xfrm>
+          <a:prstGeom prst="roundRect">
+            <a:avLst>
+              <a:gd name="adj" fmla="val 1951"/>
+            </a:avLst>
+          </a:prstGeom>
+          <a:solidFill>
+            <a:srgbClr val="F0FDF4"/>
+          </a:solidFill>
+          <a:ln w="12700">
+            <a:solidFill>
+              <a:srgbClr val="16A34A"/>
+            </a:solidFill>
+            <a:prstDash val="solid"/>
+          </a:ln>
+        </p:spPr>
+      </p:sp>
+      <p:sp>
+        <p:nvSpPr>
+          <p:cNvPr id="15" name="Text 12"/>
+          <p:cNvSpPr/>
+          <p:nvPr/>
+        </p:nvSpPr>
+        <p:spPr>
+          <a:xfrm>
+            <a:off x="6537960" y="2103120"/>
+            <a:ext cx="4800600" cy="365760"/>
+          </a:xfrm>
+          <a:prstGeom prst="rect">
+            <a:avLst/>
+          </a:prstGeom>
+          <a:noFill/>
+          <a:ln/>
+        </p:spPr>
+        <p:txBody>
+          <a:bodyPr wrap="square" rtlCol="0" anchor="ctr"/>
+          <a:lstStyle/>
+          <a:p>
+            <a:pPr indent="0" marL="0">
+              <a:buNone/>
+            </a:pPr>
+            <a:r>
+              <a:rPr lang="en-US" sz="1500" b="1" dirty="0">
+                <a:solidFill>
+                  <a:srgbClr val="16A34A"/>
+                </a:solidFill>
+                <a:latin typeface="Calibri" pitchFamily="34" charset="0"/>
+                <a:ea typeface="Calibri" pitchFamily="34" charset="-122"/>
+                <a:cs typeface="Calibri" pitchFamily="34" charset="-120"/>
+              </a:rPr>
+              <a:t>Source B</a:t>
+            </a:r>
+            <a:endParaRPr lang="en-US" sz="1500" dirty="0"/>
+          </a:p>
+        </p:txBody>
+      </p:sp>
+      <p:sp>
+        <p:nvSpPr>
+          <p:cNvPr id="16" name="Text 13"/>
+          <p:cNvSpPr/>
+          <p:nvPr/>
+        </p:nvSpPr>
+        <p:spPr>
+          <a:xfrm>
+            <a:off x="6537960" y="2514600"/>
+            <a:ext cx="4800600" cy="914400"/>
+          </a:xfrm>
+          <a:prstGeom prst="rect">
+            <a:avLst/>
+          </a:prstGeom>
+          <a:noFill/>
+          <a:ln/>
+        </p:spPr>
+        <p:txBody>
+          <a:bodyPr wrap="square" rtlCol="0" anchor="ctr"/>
+          <a:lstStyle/>
+          <a:p>
+            <a:pPr indent="0" marL="0">
+              <a:buNone/>
+            </a:pPr>
+            <a:r>
+              <a:rPr lang="en-US" sz="1250" dirty="0">
                 <a:solidFill>
                   <a:srgbClr val="2A2A2A"/>
                 </a:solidFill>
@@ -6510,22 +7489,61 @@
                 <a:ea typeface="Calibri" pitchFamily="34" charset="-122"/>
                 <a:cs typeface="Calibri" pitchFamily="34" charset="-120"/>
               </a:rPr>
-              <a:t>Commitment and giving back</a:t>
-            </a:r>
-            <a:endParaRPr lang="en-US" sz="1300" dirty="0"/>
-          </a:p>
-        </p:txBody>
-      </p:sp>
-      <p:sp>
-        <p:nvSpPr>
-          <p:cNvPr id="10" name="Text 7"/>
-          <p:cNvSpPr/>
-          <p:nvPr/>
-        </p:nvSpPr>
-        <p:spPr>
-          <a:xfrm>
-            <a:off x="548640" y="3063240"/>
-            <a:ext cx="5303520" cy="457200"/>
+              <a:t>The charity's own official website, with an 'About Us' page updated this year and named trustees.</a:t>
+            </a:r>
+            <a:endParaRPr lang="en-US" sz="1250" dirty="0"/>
+          </a:p>
+        </p:txBody>
+      </p:sp>
+      <p:sp>
+        <p:nvSpPr>
+          <p:cNvPr id="17" name="Text 14"/>
+          <p:cNvSpPr/>
+          <p:nvPr/>
+        </p:nvSpPr>
+        <p:spPr>
+          <a:xfrm>
+            <a:off x="6537960" y="3474720"/>
+            <a:ext cx="4800600" cy="274320"/>
+          </a:xfrm>
+          <a:prstGeom prst="rect">
+            <a:avLst/>
+          </a:prstGeom>
+          <a:noFill/>
+          <a:ln/>
+        </p:spPr>
+        <p:txBody>
+          <a:bodyPr wrap="square" rtlCol="0" anchor="ctr"/>
+          <a:lstStyle/>
+          <a:p>
+            <a:pPr indent="0" marL="0">
+              <a:buNone/>
+            </a:pPr>
+            <a:r>
+              <a:rPr lang="en-US" sz="1200" b="1" dirty="0">
+                <a:solidFill>
+                  <a:srgbClr val="16A34A"/>
+                </a:solidFill>
+                <a:latin typeface="Calibri" pitchFamily="34" charset="0"/>
+                <a:ea typeface="Calibri" pitchFamily="34" charset="-122"/>
+                <a:cs typeface="Calibri" pitchFamily="34" charset="-120"/>
+              </a:rPr>
+              <a:t>Why it's stronger:</a:t>
+            </a:r>
+            <a:endParaRPr lang="en-US" sz="1200" dirty="0"/>
+          </a:p>
+        </p:txBody>
+      </p:sp>
+      <p:sp>
+        <p:nvSpPr>
+          <p:cNvPr id="18" name="Text 15"/>
+          <p:cNvSpPr/>
+          <p:nvPr/>
+        </p:nvSpPr>
+        <p:spPr>
+          <a:xfrm>
+            <a:off x="6537960" y="3794760"/>
+            <a:ext cx="4800600" cy="365760"/>
           </a:xfrm>
           <a:prstGeom prst="rect">
             <a:avLst/>
@@ -6539,157 +7557,18 @@
           <a:p>
             <a:pPr marL="342900" indent="-342900">
               <a:buSzPct val="100000"/>
-              <a:buChar char="▪"/>
-            </a:pPr>
-            <a:r>
-              <a:rPr lang="en-US" sz="1300" dirty="0">
-                <a:solidFill>
-                  <a:srgbClr val="2A2A2A"/>
-                </a:solidFill>
-                <a:latin typeface="Calibri" pitchFamily="34" charset="0"/>
-                <a:ea typeface="Calibri" pitchFamily="34" charset="-122"/>
-                <a:cs typeface="Calibri" pitchFamily="34" charset="-120"/>
-              </a:rPr>
-              <a:t>Experience of public-service work</a:t>
-            </a:r>
-            <a:endParaRPr lang="en-US" sz="1300" dirty="0"/>
-          </a:p>
-        </p:txBody>
-      </p:sp>
-      <p:sp>
-        <p:nvSpPr>
-          <p:cNvPr id="11" name="Shape 8"/>
-          <p:cNvSpPr/>
-          <p:nvPr/>
-        </p:nvSpPr>
-        <p:spPr>
-          <a:xfrm>
-            <a:off x="6172200" y="1097280"/>
-            <a:ext cx="5440680" cy="4343400"/>
-          </a:xfrm>
-          <a:prstGeom prst="roundRect">
-            <a:avLst>
-              <a:gd name="adj" fmla="val 1684"/>
-            </a:avLst>
-          </a:prstGeom>
-          <a:solidFill>
-            <a:srgbClr val="E8EEF7"/>
-          </a:solidFill>
-          <a:ln/>
-        </p:spPr>
-      </p:sp>
-      <p:sp>
-        <p:nvSpPr>
-          <p:cNvPr id="12" name="Text 9"/>
-          <p:cNvSpPr/>
-          <p:nvPr/>
-        </p:nvSpPr>
-        <p:spPr>
-          <a:xfrm>
-            <a:off x="6446520" y="1325880"/>
-            <a:ext cx="4937760" cy="365760"/>
-          </a:xfrm>
-          <a:prstGeom prst="rect">
-            <a:avLst/>
-          </a:prstGeom>
-          <a:noFill/>
-          <a:ln/>
-        </p:spPr>
-        <p:txBody>
-          <a:bodyPr wrap="square" rtlCol="0" anchor="ctr"/>
-          <a:lstStyle/>
-          <a:p>
-            <a:pPr indent="0" marL="0">
-              <a:buNone/>
-            </a:pPr>
-            <a:r>
-              <a:rPr lang="en-US" sz="1600" b="1" dirty="0">
-                <a:solidFill>
-                  <a:srgbClr val="122952"/>
-                </a:solidFill>
-                <a:latin typeface="Calibri" pitchFamily="34" charset="0"/>
-                <a:ea typeface="Calibri" pitchFamily="34" charset="-122"/>
-                <a:cs typeface="Calibri" pitchFamily="34" charset="-120"/>
-              </a:rPr>
-              <a:t>Skills needed to volunteer</a:t>
-            </a:r>
-            <a:endParaRPr lang="en-US" sz="1600" dirty="0"/>
-          </a:p>
-        </p:txBody>
-      </p:sp>
-      <p:sp>
-        <p:nvSpPr>
-          <p:cNvPr id="13" name="Text 10"/>
-          <p:cNvSpPr/>
-          <p:nvPr/>
-        </p:nvSpPr>
-        <p:spPr>
-          <a:xfrm>
-            <a:off x="6446520" y="1874520"/>
-            <a:ext cx="4937760" cy="320040"/>
-          </a:xfrm>
-          <a:prstGeom prst="rect">
-            <a:avLst/>
-          </a:prstGeom>
-          <a:noFill/>
-          <a:ln/>
-        </p:spPr>
-        <p:txBody>
-          <a:bodyPr wrap="square" rtlCol="0" anchor="ctr"/>
-          <a:lstStyle/>
-          <a:p>
-            <a:pPr indent="0" marL="0">
-              <a:buNone/>
-            </a:pPr>
-            <a:r>
-              <a:rPr lang="en-US" sz="1300" b="1" dirty="0">
-                <a:solidFill>
-                  <a:srgbClr val="122952"/>
-                </a:solidFill>
-                <a:latin typeface="Calibri" pitchFamily="34" charset="0"/>
-                <a:ea typeface="Calibri" pitchFamily="34" charset="-122"/>
-                <a:cs typeface="Calibri" pitchFamily="34" charset="-120"/>
-              </a:rPr>
-              <a:t>Personal skills</a:t>
-            </a:r>
-            <a:endParaRPr lang="en-US" sz="1300" dirty="0"/>
-          </a:p>
-        </p:txBody>
-      </p:sp>
-      <p:sp>
-        <p:nvSpPr>
-          <p:cNvPr id="14" name="Text 11"/>
-          <p:cNvSpPr/>
-          <p:nvPr/>
-        </p:nvSpPr>
-        <p:spPr>
-          <a:xfrm>
-            <a:off x="6446520" y="2240280"/>
-            <a:ext cx="4937760" cy="685800"/>
-          </a:xfrm>
-          <a:prstGeom prst="rect">
-            <a:avLst/>
-          </a:prstGeom>
-          <a:noFill/>
-          <a:ln/>
-        </p:spPr>
-        <p:txBody>
-          <a:bodyPr wrap="square" rtlCol="0" anchor="ctr"/>
-          <a:lstStyle/>
-          <a:p>
-            <a:pPr indent="0" marL="0">
-              <a:buNone/>
+              <a:buChar char="✓"/>
             </a:pPr>
             <a:r>
               <a:rPr lang="en-US" sz="1200" dirty="0">
                 <a:solidFill>
-                  <a:srgbClr val="2A2A2A"/>
-                </a:solidFill>
-                <a:latin typeface="Calibri" pitchFamily="34" charset="0"/>
-                <a:ea typeface="Calibri" pitchFamily="34" charset="-122"/>
-                <a:cs typeface="Calibri" pitchFamily="34" charset="-120"/>
-              </a:rPr>
-              <a:t>Commitment, discipline, self-management, time management, punctuality, reliability</a:t>
+                  <a:srgbClr val="16A34A"/>
+                </a:solidFill>
+                <a:latin typeface="Calibri" pitchFamily="34" charset="0"/>
+                <a:ea typeface="Calibri" pitchFamily="34" charset="-122"/>
+                <a:cs typeface="Calibri" pitchFamily="34" charset="-120"/>
+              </a:rPr>
+              <a:t>Official — comes from the organisation itself</a:t>
             </a:r>
             <a:endParaRPr lang="en-US" sz="1200" dirty="0"/>
           </a:p>
@@ -6697,77 +7576,39 @@
       </p:sp>
       <p:sp>
         <p:nvSpPr>
-          <p:cNvPr id="15" name="Text 12"/>
-          <p:cNvSpPr/>
-          <p:nvPr/>
-        </p:nvSpPr>
-        <p:spPr>
-          <a:xfrm>
-            <a:off x="6446520" y="3017520"/>
-            <a:ext cx="4937760" cy="320040"/>
-          </a:xfrm>
-          <a:prstGeom prst="rect">
-            <a:avLst/>
-          </a:prstGeom>
-          <a:noFill/>
-          <a:ln/>
-        </p:spPr>
-        <p:txBody>
-          <a:bodyPr wrap="square" rtlCol="0" anchor="ctr"/>
-          <a:lstStyle/>
-          <a:p>
-            <a:pPr indent="0" marL="0">
-              <a:buNone/>
-            </a:pPr>
-            <a:r>
-              <a:rPr lang="en-US" sz="1300" b="1" dirty="0">
-                <a:solidFill>
-                  <a:srgbClr val="122952"/>
-                </a:solidFill>
-                <a:latin typeface="Calibri" pitchFamily="34" charset="0"/>
-                <a:ea typeface="Calibri" pitchFamily="34" charset="-122"/>
-                <a:cs typeface="Calibri" pitchFamily="34" charset="-120"/>
-              </a:rPr>
-              <a:t>Interpersonal skills</a:t>
-            </a:r>
-            <a:endParaRPr lang="en-US" sz="1300" dirty="0"/>
-          </a:p>
-        </p:txBody>
-      </p:sp>
-      <p:sp>
-        <p:nvSpPr>
-          <p:cNvPr id="16" name="Text 13"/>
-          <p:cNvSpPr/>
-          <p:nvPr/>
-        </p:nvSpPr>
-        <p:spPr>
-          <a:xfrm>
-            <a:off x="6446520" y="3383280"/>
-            <a:ext cx="4937760" cy="685800"/>
-          </a:xfrm>
-          <a:prstGeom prst="rect">
-            <a:avLst/>
-          </a:prstGeom>
-          <a:noFill/>
-          <a:ln/>
-        </p:spPr>
-        <p:txBody>
-          <a:bodyPr wrap="square" rtlCol="0" anchor="ctr"/>
-          <a:lstStyle/>
-          <a:p>
-            <a:pPr indent="0" marL="0">
-              <a:buNone/>
+          <p:cNvPr id="19" name="Text 16"/>
+          <p:cNvSpPr/>
+          <p:nvPr/>
+        </p:nvSpPr>
+        <p:spPr>
+          <a:xfrm>
+            <a:off x="6537960" y="4206240"/>
+            <a:ext cx="4800600" cy="365760"/>
+          </a:xfrm>
+          <a:prstGeom prst="rect">
+            <a:avLst/>
+          </a:prstGeom>
+          <a:noFill/>
+          <a:ln/>
+        </p:spPr>
+        <p:txBody>
+          <a:bodyPr wrap="square" rtlCol="0" anchor="ctr"/>
+          <a:lstStyle/>
+          <a:p>
+            <a:pPr marL="342900" indent="-342900">
+              <a:buSzPct val="100000"/>
+              <a:buChar char="✓"/>
             </a:pPr>
             <a:r>
               <a:rPr lang="en-US" sz="1200" dirty="0">
                 <a:solidFill>
-                  <a:srgbClr val="2A2A2A"/>
-                </a:solidFill>
-                <a:latin typeface="Calibri" pitchFamily="34" charset="0"/>
-                <a:ea typeface="Calibri" pitchFamily="34" charset="-122"/>
-                <a:cs typeface="Calibri" pitchFamily="34" charset="-120"/>
-              </a:rPr>
-              <a:t>Teamwork, respect, helping others, taking part</a:t>
+                  <a:srgbClr val="16A34A"/>
+                </a:solidFill>
+                <a:latin typeface="Calibri" pitchFamily="34" charset="0"/>
+                <a:ea typeface="Calibri" pitchFamily="34" charset="-122"/>
+                <a:cs typeface="Calibri" pitchFamily="34" charset="-120"/>
+              </a:rPr>
+              <a:t>Recent — reflects current activities</a:t>
             </a:r>
             <a:endParaRPr lang="en-US" sz="1200" dirty="0"/>
           </a:p>
@@ -6775,77 +7616,39 @@
       </p:sp>
       <p:sp>
         <p:nvSpPr>
-          <p:cNvPr id="17" name="Text 14"/>
-          <p:cNvSpPr/>
-          <p:nvPr/>
-        </p:nvSpPr>
-        <p:spPr>
-          <a:xfrm>
-            <a:off x="6446520" y="4160520"/>
-            <a:ext cx="4937760" cy="320040"/>
-          </a:xfrm>
-          <a:prstGeom prst="rect">
-            <a:avLst/>
-          </a:prstGeom>
-          <a:noFill/>
-          <a:ln/>
-        </p:spPr>
-        <p:txBody>
-          <a:bodyPr wrap="square" rtlCol="0" anchor="ctr"/>
-          <a:lstStyle/>
-          <a:p>
-            <a:pPr indent="0" marL="0">
-              <a:buNone/>
-            </a:pPr>
-            <a:r>
-              <a:rPr lang="en-US" sz="1300" b="1" dirty="0">
-                <a:solidFill>
-                  <a:srgbClr val="122952"/>
-                </a:solidFill>
-                <a:latin typeface="Calibri" pitchFamily="34" charset="0"/>
-                <a:ea typeface="Calibri" pitchFamily="34" charset="-122"/>
-                <a:cs typeface="Calibri" pitchFamily="34" charset="-120"/>
-              </a:rPr>
-              <a:t>Specific skills</a:t>
-            </a:r>
-            <a:endParaRPr lang="en-US" sz="1300" dirty="0"/>
-          </a:p>
-        </p:txBody>
-      </p:sp>
-      <p:sp>
-        <p:nvSpPr>
-          <p:cNvPr id="18" name="Text 15"/>
-          <p:cNvSpPr/>
-          <p:nvPr/>
-        </p:nvSpPr>
-        <p:spPr>
-          <a:xfrm>
-            <a:off x="6446520" y="4526280"/>
-            <a:ext cx="4937760" cy="685800"/>
-          </a:xfrm>
-          <a:prstGeom prst="rect">
-            <a:avLst/>
-          </a:prstGeom>
-          <a:noFill/>
-          <a:ln/>
-        </p:spPr>
-        <p:txBody>
-          <a:bodyPr wrap="square" rtlCol="0" anchor="ctr"/>
-          <a:lstStyle/>
-          <a:p>
-            <a:pPr indent="0" marL="0">
-              <a:buNone/>
+          <p:cNvPr id="20" name="Text 17"/>
+          <p:cNvSpPr/>
+          <p:nvPr/>
+        </p:nvSpPr>
+        <p:spPr>
+          <a:xfrm>
+            <a:off x="6537960" y="4617720"/>
+            <a:ext cx="4800600" cy="365760"/>
+          </a:xfrm>
+          <a:prstGeom prst="rect">
+            <a:avLst/>
+          </a:prstGeom>
+          <a:noFill/>
+          <a:ln/>
+        </p:spPr>
+        <p:txBody>
+          <a:bodyPr wrap="square" rtlCol="0" anchor="ctr"/>
+          <a:lstStyle/>
+          <a:p>
+            <a:pPr marL="342900" indent="-342900">
+              <a:buSzPct val="100000"/>
+              <a:buChar char="✓"/>
             </a:pPr>
             <a:r>
               <a:rPr lang="en-US" sz="1200" dirty="0">
                 <a:solidFill>
-                  <a:srgbClr val="2A2A2A"/>
-                </a:solidFill>
-                <a:latin typeface="Calibri" pitchFamily="34" charset="0"/>
-                <a:ea typeface="Calibri" pitchFamily="34" charset="-122"/>
-                <a:cs typeface="Calibri" pitchFamily="34" charset="-120"/>
-              </a:rPr>
-              <a:t>Driving, cooking, computer use, sign language, physical fitness (for some roles)</a:t>
+                  <a:srgbClr val="16A34A"/>
+                </a:solidFill>
+                <a:latin typeface="Calibri" pitchFamily="34" charset="0"/>
+                <a:ea typeface="Calibri" pitchFamily="34" charset="-122"/>
+                <a:cs typeface="Calibri" pitchFamily="34" charset="-120"/>
+              </a:rPr>
+              <a:t>Named, accountable authors</a:t>
             </a:r>
             <a:endParaRPr lang="en-US" sz="1200" dirty="0"/>
           </a:p>
@@ -6853,7 +7656,7 @@
       </p:sp>
       <p:sp>
         <p:nvSpPr>
-          <p:cNvPr id="19" name="Shape 16"/>
+          <p:cNvPr id="21" name="Shape 18"/>
           <p:cNvSpPr/>
           <p:nvPr/>
         </p:nvSpPr>
@@ -6873,7 +7676,7 @@
       </p:sp>
       <p:sp>
         <p:nvSpPr>
-          <p:cNvPr id="20" name="Text 17"/>
+          <p:cNvPr id="22" name="Text 19"/>
           <p:cNvSpPr/>
           <p:nvPr/>
         </p:nvSpPr>
@@ -6912,7 +7715,7 @@
       </p:sp>
       <p:sp>
         <p:nvSpPr>
-          <p:cNvPr id="21" name="Text 18"/>
+          <p:cNvPr id="23" name="Text 20"/>
           <p:cNvSpPr/>
           <p:nvPr/>
         </p:nvSpPr>
@@ -6943,7 +7746,7 @@
                 <a:ea typeface="Calibri" pitchFamily="34" charset="-122"/>
                 <a:cs typeface="Calibri" pitchFamily="34" charset="-120"/>
               </a:rPr>
-              <a:t>Knowledge Hub 3 — Benefits to You and Skills You Need</a:t>
+              <a:t>Knowledge Hub 4 — Judging Source Quality</a:t>
             </a:r>
             <a:endParaRPr lang="en-US" sz="1000" dirty="0"/>
           </a:p>
@@ -7006,8 +7809,8 @@
         </p:nvSpPr>
         <p:spPr>
           <a:xfrm>
-            <a:off x="9692640" y="274320"/>
-            <a:ext cx="2148840" cy="384048"/>
+            <a:off x="9144000" y="274320"/>
+            <a:ext cx="2697480" cy="384048"/>
           </a:xfrm>
           <a:prstGeom prst="roundRect">
             <a:avLst>
@@ -7028,8 +7831,8 @@
         </p:nvSpPr>
         <p:spPr>
           <a:xfrm>
-            <a:off x="9692640" y="274320"/>
-            <a:ext cx="2148840" cy="384048"/>
+            <a:off x="9144000" y="274320"/>
+            <a:ext cx="2697480" cy="384048"/>
           </a:xfrm>
           <a:prstGeom prst="rect">
             <a:avLst/>
@@ -7092,7 +7895,7 @@
                 <a:ea typeface="Calibri" pitchFamily="34" charset="-122"/>
                 <a:cs typeface="Calibri" pitchFamily="34" charset="-120"/>
               </a:rPr>
-              <a:t>Finding Out and Presenting Information</a:t>
+              <a:t>Benefits to You and Skills You Need</a:t>
             </a:r>
             <a:endParaRPr lang="en-US" sz="2600" dirty="0"/>
           </a:p>
@@ -7131,7 +7934,7 @@
                 <a:ea typeface="Calibri" pitchFamily="34" charset="-122"/>
                 <a:cs typeface="Calibri" pitchFamily="34" charset="-120"/>
               </a:rPr>
-              <a:t>Where to find out about volunteering</a:t>
+              <a:t>Benefits for the individual</a:t>
             </a:r>
             <a:endParaRPr lang="en-US" sz="1600" dirty="0"/>
           </a:p>
@@ -7146,7 +7949,7 @@
         <p:spPr>
           <a:xfrm>
             <a:off x="548640" y="1554480"/>
-            <a:ext cx="5303520" cy="411480"/>
+            <a:ext cx="5303520" cy="457200"/>
           </a:xfrm>
           <a:prstGeom prst="rect">
             <a:avLst/>
@@ -7171,7 +7974,7 @@
                 <a:ea typeface="Calibri" pitchFamily="34" charset="-122"/>
                 <a:cs typeface="Calibri" pitchFamily="34" charset="-120"/>
               </a:rPr>
-              <a:t>Volunteering organisations themselves</a:t>
+              <a:t>New and improved skills</a:t>
             </a:r>
             <a:endParaRPr lang="en-US" sz="1300" dirty="0"/>
           </a:p>
@@ -7185,8 +7988,8 @@
         </p:nvSpPr>
         <p:spPr>
           <a:xfrm>
-            <a:off x="548640" y="2011680"/>
-            <a:ext cx="5303520" cy="411480"/>
+            <a:off x="548640" y="2057400"/>
+            <a:ext cx="5303520" cy="457200"/>
           </a:xfrm>
           <a:prstGeom prst="rect">
             <a:avLst/>
@@ -7211,7 +8014,7 @@
                 <a:ea typeface="Calibri" pitchFamily="34" charset="-122"/>
                 <a:cs typeface="Calibri" pitchFamily="34" charset="-120"/>
               </a:rPr>
-              <a:t>Websites and blogs</a:t>
+              <a:t>Awareness of your community</a:t>
             </a:r>
             <a:endParaRPr lang="en-US" sz="1300" dirty="0"/>
           </a:p>
@@ -7225,8 +8028,8 @@
         </p:nvSpPr>
         <p:spPr>
           <a:xfrm>
-            <a:off x="548640" y="2468880"/>
-            <a:ext cx="5303520" cy="411480"/>
+            <a:off x="548640" y="2560320"/>
+            <a:ext cx="5303520" cy="457200"/>
           </a:xfrm>
           <a:prstGeom prst="rect">
             <a:avLst/>
@@ -7251,7 +8054,7 @@
                 <a:ea typeface="Calibri" pitchFamily="34" charset="-122"/>
                 <a:cs typeface="Calibri" pitchFamily="34" charset="-120"/>
               </a:rPr>
-              <a:t>Local community centres</a:t>
+              <a:t>Commitment and giving back</a:t>
             </a:r>
             <a:endParaRPr lang="en-US" sz="1300" dirty="0"/>
           </a:p>
@@ -7265,8 +8068,8 @@
         </p:nvSpPr>
         <p:spPr>
           <a:xfrm>
-            <a:off x="548640" y="2926080"/>
-            <a:ext cx="5303520" cy="411480"/>
+            <a:off x="548640" y="3063240"/>
+            <a:ext cx="5303520" cy="457200"/>
           </a:xfrm>
           <a:prstGeom prst="rect">
             <a:avLst/>
@@ -7291,7 +8094,7 @@
                 <a:ea typeface="Calibri" pitchFamily="34" charset="-122"/>
                 <a:cs typeface="Calibri" pitchFamily="34" charset="-120"/>
               </a:rPr>
-              <a:t>Local authorities (the council)</a:t>
+              <a:t>Experience of public-service work</a:t>
             </a:r>
             <a:endParaRPr lang="en-US" sz="1300" dirty="0"/>
           </a:p>
@@ -7299,47 +8102,7 @@
       </p:sp>
       <p:sp>
         <p:nvSpPr>
-          <p:cNvPr id="11" name="Text 8"/>
-          <p:cNvSpPr/>
-          <p:nvPr/>
-        </p:nvSpPr>
-        <p:spPr>
-          <a:xfrm>
-            <a:off x="548640" y="3383280"/>
-            <a:ext cx="5303520" cy="411480"/>
-          </a:xfrm>
-          <a:prstGeom prst="rect">
-            <a:avLst/>
-          </a:prstGeom>
-          <a:noFill/>
-          <a:ln/>
-        </p:spPr>
-        <p:txBody>
-          <a:bodyPr wrap="square" rtlCol="0" anchor="ctr"/>
-          <a:lstStyle/>
-          <a:p>
-            <a:pPr marL="342900" indent="-342900">
-              <a:buSzPct val="100000"/>
-              <a:buChar char="▪"/>
-            </a:pPr>
-            <a:r>
-              <a:rPr lang="en-US" sz="1300" dirty="0">
-                <a:solidFill>
-                  <a:srgbClr val="2A2A2A"/>
-                </a:solidFill>
-                <a:latin typeface="Calibri" pitchFamily="34" charset="0"/>
-                <a:ea typeface="Calibri" pitchFamily="34" charset="-122"/>
-                <a:cs typeface="Calibri" pitchFamily="34" charset="-120"/>
-              </a:rPr>
-              <a:t>Noticeboards in public places</a:t>
-            </a:r>
-            <a:endParaRPr lang="en-US" sz="1300" dirty="0"/>
-          </a:p>
-        </p:txBody>
-      </p:sp>
-      <p:sp>
-        <p:nvSpPr>
-          <p:cNvPr id="12" name="Shape 9"/>
+          <p:cNvPr id="11" name="Shape 8"/>
           <p:cNvSpPr/>
           <p:nvPr/>
         </p:nvSpPr>
@@ -7361,7 +8124,7 @@
       </p:sp>
       <p:sp>
         <p:nvSpPr>
-          <p:cNvPr id="13" name="Text 10"/>
+          <p:cNvPr id="12" name="Text 9"/>
           <p:cNvSpPr/>
           <p:nvPr/>
         </p:nvSpPr>
@@ -7392,7 +8155,7 @@
                 <a:ea typeface="Calibri" pitchFamily="34" charset="-122"/>
                 <a:cs typeface="Calibri" pitchFamily="34" charset="-120"/>
               </a:rPr>
-              <a:t>Good information for Task A is:</a:t>
+              <a:t>Skills needed to volunteer</a:t>
             </a:r>
             <a:endParaRPr lang="en-US" sz="1600" dirty="0"/>
           </a:p>
@@ -7400,31 +8163,69 @@
       </p:sp>
       <p:sp>
         <p:nvSpPr>
+          <p:cNvPr id="13" name="Text 10"/>
+          <p:cNvSpPr/>
+          <p:nvPr/>
+        </p:nvSpPr>
+        <p:spPr>
+          <a:xfrm>
+            <a:off x="6446520" y="1874520"/>
+            <a:ext cx="4937760" cy="320040"/>
+          </a:xfrm>
+          <a:prstGeom prst="rect">
+            <a:avLst/>
+          </a:prstGeom>
+          <a:noFill/>
+          <a:ln/>
+        </p:spPr>
+        <p:txBody>
+          <a:bodyPr wrap="square" rtlCol="0" anchor="ctr"/>
+          <a:lstStyle/>
+          <a:p>
+            <a:pPr indent="0" marL="0">
+              <a:buNone/>
+            </a:pPr>
+            <a:r>
+              <a:rPr lang="en-US" sz="1300" b="1" dirty="0">
+                <a:solidFill>
+                  <a:srgbClr val="122952"/>
+                </a:solidFill>
+                <a:latin typeface="Calibri" pitchFamily="34" charset="0"/>
+                <a:ea typeface="Calibri" pitchFamily="34" charset="-122"/>
+                <a:cs typeface="Calibri" pitchFamily="34" charset="-120"/>
+              </a:rPr>
+              <a:t>Personal skills</a:t>
+            </a:r>
+            <a:endParaRPr lang="en-US" sz="1300" dirty="0"/>
+          </a:p>
+        </p:txBody>
+      </p:sp>
+      <p:sp>
+        <p:nvSpPr>
           <p:cNvPr id="14" name="Text 11"/>
           <p:cNvSpPr/>
           <p:nvPr/>
         </p:nvSpPr>
         <p:spPr>
           <a:xfrm>
-            <a:off x="6446520" y="1874520"/>
-            <a:ext cx="4937760" cy="502920"/>
-          </a:xfrm>
-          <a:prstGeom prst="rect">
-            <a:avLst/>
-          </a:prstGeom>
-          <a:noFill/>
-          <a:ln/>
-        </p:spPr>
-        <p:txBody>
-          <a:bodyPr wrap="square" rtlCol="0" anchor="ctr"/>
-          <a:lstStyle/>
-          <a:p>
-            <a:pPr marL="342900" indent="-342900">
-              <a:buSzPct val="100000"/>
-              <a:buChar char="▪"/>
-            </a:pPr>
-            <a:r>
-              <a:rPr lang="en-US" sz="1300" dirty="0">
+            <a:off x="6446520" y="2240280"/>
+            <a:ext cx="4937760" cy="685800"/>
+          </a:xfrm>
+          <a:prstGeom prst="rect">
+            <a:avLst/>
+          </a:prstGeom>
+          <a:noFill/>
+          <a:ln/>
+        </p:spPr>
+        <p:txBody>
+          <a:bodyPr wrap="square" rtlCol="0" anchor="ctr"/>
+          <a:lstStyle/>
+          <a:p>
+            <a:pPr indent="0" marL="0">
+              <a:buNone/>
+            </a:pPr>
+            <a:r>
+              <a:rPr lang="en-US" sz="1200" dirty="0">
                 <a:solidFill>
                   <a:srgbClr val="2A2A2A"/>
                 </a:solidFill>
@@ -7432,7 +8233,46 @@
                 <a:ea typeface="Calibri" pitchFamily="34" charset="-122"/>
                 <a:cs typeface="Calibri" pitchFamily="34" charset="-120"/>
               </a:rPr>
-              <a:t>Clear and easy to understand</a:t>
+              <a:t>Commitment, discipline, self-management, time management, punctuality, reliability</a:t>
+            </a:r>
+            <a:endParaRPr lang="en-US" sz="1200" dirty="0"/>
+          </a:p>
+        </p:txBody>
+      </p:sp>
+      <p:sp>
+        <p:nvSpPr>
+          <p:cNvPr id="15" name="Text 12"/>
+          <p:cNvSpPr/>
+          <p:nvPr/>
+        </p:nvSpPr>
+        <p:spPr>
+          <a:xfrm>
+            <a:off x="6446520" y="3017520"/>
+            <a:ext cx="4937760" cy="320040"/>
+          </a:xfrm>
+          <a:prstGeom prst="rect">
+            <a:avLst/>
+          </a:prstGeom>
+          <a:noFill/>
+          <a:ln/>
+        </p:spPr>
+        <p:txBody>
+          <a:bodyPr wrap="square" rtlCol="0" anchor="ctr"/>
+          <a:lstStyle/>
+          <a:p>
+            <a:pPr indent="0" marL="0">
+              <a:buNone/>
+            </a:pPr>
+            <a:r>
+              <a:rPr lang="en-US" sz="1300" b="1" dirty="0">
+                <a:solidFill>
+                  <a:srgbClr val="122952"/>
+                </a:solidFill>
+                <a:latin typeface="Calibri" pitchFamily="34" charset="0"/>
+                <a:ea typeface="Calibri" pitchFamily="34" charset="-122"/>
+                <a:cs typeface="Calibri" pitchFamily="34" charset="-120"/>
+              </a:rPr>
+              <a:t>Interpersonal skills</a:t>
             </a:r>
             <a:endParaRPr lang="en-US" sz="1300" dirty="0"/>
           </a:p>
@@ -7440,31 +8280,30 @@
       </p:sp>
       <p:sp>
         <p:nvSpPr>
-          <p:cNvPr id="15" name="Text 12"/>
-          <p:cNvSpPr/>
-          <p:nvPr/>
-        </p:nvSpPr>
-        <p:spPr>
-          <a:xfrm>
-            <a:off x="6446520" y="2423160"/>
-            <a:ext cx="4937760" cy="502920"/>
-          </a:xfrm>
-          <a:prstGeom prst="rect">
-            <a:avLst/>
-          </a:prstGeom>
-          <a:noFill/>
-          <a:ln/>
-        </p:spPr>
-        <p:txBody>
-          <a:bodyPr wrap="square" rtlCol="0" anchor="ctr"/>
-          <a:lstStyle/>
-          <a:p>
-            <a:pPr marL="342900" indent="-342900">
-              <a:buSzPct val="100000"/>
-              <a:buChar char="▪"/>
-            </a:pPr>
-            <a:r>
-              <a:rPr lang="en-US" sz="1300" dirty="0">
+          <p:cNvPr id="16" name="Text 13"/>
+          <p:cNvSpPr/>
+          <p:nvPr/>
+        </p:nvSpPr>
+        <p:spPr>
+          <a:xfrm>
+            <a:off x="6446520" y="3383280"/>
+            <a:ext cx="4937760" cy="685800"/>
+          </a:xfrm>
+          <a:prstGeom prst="rect">
+            <a:avLst/>
+          </a:prstGeom>
+          <a:noFill/>
+          <a:ln/>
+        </p:spPr>
+        <p:txBody>
+          <a:bodyPr wrap="square" rtlCol="0" anchor="ctr"/>
+          <a:lstStyle/>
+          <a:p>
+            <a:pPr indent="0" marL="0">
+              <a:buNone/>
+            </a:pPr>
+            <a:r>
+              <a:rPr lang="en-US" sz="1200" dirty="0">
                 <a:solidFill>
                   <a:srgbClr val="2A2A2A"/>
                 </a:solidFill>
@@ -7472,7 +8311,46 @@
                 <a:ea typeface="Calibri" pitchFamily="34" charset="-122"/>
                 <a:cs typeface="Calibri" pitchFamily="34" charset="-120"/>
               </a:rPr>
-              <a:t>Set out in a sensible order with headings</a:t>
+              <a:t>Teamwork, respect, helping others, taking part</a:t>
+            </a:r>
+            <a:endParaRPr lang="en-US" sz="1200" dirty="0"/>
+          </a:p>
+        </p:txBody>
+      </p:sp>
+      <p:sp>
+        <p:nvSpPr>
+          <p:cNvPr id="17" name="Text 14"/>
+          <p:cNvSpPr/>
+          <p:nvPr/>
+        </p:nvSpPr>
+        <p:spPr>
+          <a:xfrm>
+            <a:off x="6446520" y="4160520"/>
+            <a:ext cx="4937760" cy="320040"/>
+          </a:xfrm>
+          <a:prstGeom prst="rect">
+            <a:avLst/>
+          </a:prstGeom>
+          <a:noFill/>
+          <a:ln/>
+        </p:spPr>
+        <p:txBody>
+          <a:bodyPr wrap="square" rtlCol="0" anchor="ctr"/>
+          <a:lstStyle/>
+          <a:p>
+            <a:pPr indent="0" marL="0">
+              <a:buNone/>
+            </a:pPr>
+            <a:r>
+              <a:rPr lang="en-US" sz="1300" b="1" dirty="0">
+                <a:solidFill>
+                  <a:srgbClr val="122952"/>
+                </a:solidFill>
+                <a:latin typeface="Calibri" pitchFamily="34" charset="0"/>
+                <a:ea typeface="Calibri" pitchFamily="34" charset="-122"/>
+                <a:cs typeface="Calibri" pitchFamily="34" charset="-120"/>
+              </a:rPr>
+              <a:t>Specific skills</a:t>
             </a:r>
             <a:endParaRPr lang="en-US" sz="1300" dirty="0"/>
           </a:p>
@@ -7480,31 +8358,30 @@
       </p:sp>
       <p:sp>
         <p:nvSpPr>
-          <p:cNvPr id="16" name="Text 13"/>
-          <p:cNvSpPr/>
-          <p:nvPr/>
-        </p:nvSpPr>
-        <p:spPr>
-          <a:xfrm>
-            <a:off x="6446520" y="2971800"/>
-            <a:ext cx="4937760" cy="502920"/>
-          </a:xfrm>
-          <a:prstGeom prst="rect">
-            <a:avLst/>
-          </a:prstGeom>
-          <a:noFill/>
-          <a:ln/>
-        </p:spPr>
-        <p:txBody>
-          <a:bodyPr wrap="square" rtlCol="0" anchor="ctr"/>
-          <a:lstStyle/>
-          <a:p>
-            <a:pPr marL="342900" indent="-342900">
-              <a:buSzPct val="100000"/>
-              <a:buChar char="▪"/>
-            </a:pPr>
-            <a:r>
-              <a:rPr lang="en-US" sz="1300" dirty="0">
+          <p:cNvPr id="18" name="Text 15"/>
+          <p:cNvSpPr/>
+          <p:nvPr/>
+        </p:nvSpPr>
+        <p:spPr>
+          <a:xfrm>
+            <a:off x="6446520" y="4526280"/>
+            <a:ext cx="4937760" cy="685800"/>
+          </a:xfrm>
+          <a:prstGeom prst="rect">
+            <a:avLst/>
+          </a:prstGeom>
+          <a:noFill/>
+          <a:ln/>
+        </p:spPr>
+        <p:txBody>
+          <a:bodyPr wrap="square" rtlCol="0" anchor="ctr"/>
+          <a:lstStyle/>
+          <a:p>
+            <a:pPr indent="0" marL="0">
+              <a:buNone/>
+            </a:pPr>
+            <a:r>
+              <a:rPr lang="en-US" sz="1200" dirty="0">
                 <a:solidFill>
                   <a:srgbClr val="2A2A2A"/>
                 </a:solidFill>
@@ -7512,55 +8389,15 @@
                 <a:ea typeface="Calibri" pitchFamily="34" charset="-122"/>
                 <a:cs typeface="Calibri" pitchFamily="34" charset="-120"/>
               </a:rPr>
-              <a:t>Written in language that suits your audience</a:t>
-            </a:r>
-            <a:endParaRPr lang="en-US" sz="1300" dirty="0"/>
-          </a:p>
-        </p:txBody>
-      </p:sp>
-      <p:sp>
-        <p:nvSpPr>
-          <p:cNvPr id="17" name="Text 14"/>
-          <p:cNvSpPr/>
-          <p:nvPr/>
-        </p:nvSpPr>
-        <p:spPr>
-          <a:xfrm>
-            <a:off x="6446520" y="3520440"/>
-            <a:ext cx="4937760" cy="502920"/>
-          </a:xfrm>
-          <a:prstGeom prst="rect">
-            <a:avLst/>
-          </a:prstGeom>
-          <a:noFill/>
-          <a:ln/>
-        </p:spPr>
-        <p:txBody>
-          <a:bodyPr wrap="square" rtlCol="0" anchor="ctr"/>
-          <a:lstStyle/>
-          <a:p>
-            <a:pPr marL="342900" indent="-342900">
-              <a:buSzPct val="100000"/>
-              <a:buChar char="▪"/>
-            </a:pPr>
-            <a:r>
-              <a:rPr lang="en-US" sz="1300" dirty="0">
-                <a:solidFill>
-                  <a:srgbClr val="2A2A2A"/>
-                </a:solidFill>
-                <a:latin typeface="Calibri" pitchFamily="34" charset="0"/>
-                <a:ea typeface="Calibri" pitchFamily="34" charset="-122"/>
-                <a:cs typeface="Calibri" pitchFamily="34" charset="-120"/>
-              </a:rPr>
-              <a:t>Accurate — based on the sources you used</a:t>
-            </a:r>
-            <a:endParaRPr lang="en-US" sz="1300" dirty="0"/>
-          </a:p>
-        </p:txBody>
-      </p:sp>
-      <p:sp>
-        <p:nvSpPr>
-          <p:cNvPr id="18" name="Shape 15"/>
+              <a:t>Driving, cooking, computer use, sign language, physical fitness (for some roles)</a:t>
+            </a:r>
+            <a:endParaRPr lang="en-US" sz="1200" dirty="0"/>
+          </a:p>
+        </p:txBody>
+      </p:sp>
+      <p:sp>
+        <p:nvSpPr>
+          <p:cNvPr id="19" name="Shape 16"/>
           <p:cNvSpPr/>
           <p:nvPr/>
         </p:nvSpPr>
@@ -7580,7 +8417,7 @@
       </p:sp>
       <p:sp>
         <p:nvSpPr>
-          <p:cNvPr id="19" name="Text 16"/>
+          <p:cNvPr id="20" name="Text 17"/>
           <p:cNvSpPr/>
           <p:nvPr/>
         </p:nvSpPr>
@@ -7619,7 +8456,7 @@
       </p:sp>
       <p:sp>
         <p:nvSpPr>
-          <p:cNvPr id="20" name="Text 17"/>
+          <p:cNvPr id="21" name="Text 18"/>
           <p:cNvSpPr/>
           <p:nvPr/>
         </p:nvSpPr>
@@ -7650,7 +8487,7 @@
                 <a:ea typeface="Calibri" pitchFamily="34" charset="-122"/>
                 <a:cs typeface="Calibri" pitchFamily="34" charset="-120"/>
               </a:rPr>
-              <a:t>Knowledge Hub 4 — Finding Out and Presenting Information</a:t>
+              <a:t>Knowledge Hub 3 — Benefits to You and Skills You Need</a:t>
             </a:r>
             <a:endParaRPr lang="en-US" sz="1000" dirty="0"/>
           </a:p>
@@ -7667,13 +8504,6 @@
 <file path=ppt/slides/slide8.xml><?xml version="1.0" encoding="utf-8"?>
 <p:sld xmlns:a="http://schemas.openxmlformats.org/drawingml/2006/main" xmlns:r="http://schemas.openxmlformats.org/officeDocument/2006/relationships" xmlns:p="http://schemas.openxmlformats.org/presentationml/2006/main">
   <p:cSld name="Slide 8">
-    <p:bg>
-      <p:bgPr>
-        <a:solidFill>
-          <a:srgbClr val="122952"/>
-        </a:solidFill>
-      </p:bgPr>
-    </p:bg>
     <p:spTree>
       <p:nvGrpSpPr>
         <p:cNvPr id="1" name=""/>
@@ -7690,7 +8520,27 @@
       </p:grpSpPr>
       <p:sp>
         <p:nvSpPr>
-          <p:cNvPr id="2" name="Text 0"/>
+          <p:cNvPr id="2" name="Shape 0"/>
+          <p:cNvSpPr/>
+          <p:nvPr/>
+        </p:nvSpPr>
+        <p:spPr>
+          <a:xfrm>
+            <a:off x="0" y="0"/>
+            <a:ext cx="12188952" cy="6858000"/>
+          </a:xfrm>
+          <a:prstGeom prst="rect">
+            <a:avLst/>
+          </a:prstGeom>
+          <a:solidFill>
+            <a:srgbClr val="122952"/>
+          </a:solidFill>
+          <a:ln/>
+        </p:spPr>
+      </p:sp>
+      <p:sp>
+        <p:nvSpPr>
+          <p:cNvPr id="3" name="Text 1"/>
           <p:cNvSpPr/>
           <p:nvPr/>
         </p:nvSpPr>
@@ -7729,7 +8579,7 @@
       </p:sp>
       <p:sp>
         <p:nvSpPr>
-          <p:cNvPr id="3" name="Text 1"/>
+          <p:cNvPr id="4" name="Text 2"/>
           <p:cNvSpPr/>
           <p:nvPr/>
         </p:nvSpPr>
@@ -7768,7 +8618,7 @@
       </p:sp>
       <p:sp>
         <p:nvSpPr>
-          <p:cNvPr id="4" name="Text 2"/>
+          <p:cNvPr id="5" name="Text 3"/>
           <p:cNvSpPr/>
           <p:nvPr/>
         </p:nvSpPr>
@@ -7807,7 +8657,7 @@
       </p:sp>
       <p:sp>
         <p:nvSpPr>
-          <p:cNvPr id="5" name="Text 3"/>
+          <p:cNvPr id="6" name="Text 4"/>
           <p:cNvSpPr/>
           <p:nvPr/>
         </p:nvSpPr>
@@ -7901,8 +8751,8 @@
         </p:nvSpPr>
         <p:spPr>
           <a:xfrm>
-            <a:off x="9692640" y="274320"/>
-            <a:ext cx="2148840" cy="384048"/>
+            <a:off x="9144000" y="274320"/>
+            <a:ext cx="2697480" cy="384048"/>
           </a:xfrm>
           <a:prstGeom prst="roundRect">
             <a:avLst>
@@ -7923,8 +8773,8 @@
         </p:nvSpPr>
         <p:spPr>
           <a:xfrm>
-            <a:off x="9692640" y="274320"/>
-            <a:ext cx="2148840" cy="384048"/>
+            <a:off x="9144000" y="274320"/>
+            <a:ext cx="2697480" cy="384048"/>
           </a:xfrm>
           <a:prstGeom prst="rect">
             <a:avLst/>
